--- a/Topic_A/Exam_Practice/AT-A-L08_Speaking_Workshop_Doctor_Pharmacy_and_Advice.pptx
+++ b/Topic_A/Exam_Practice/AT-A-L08_Speaking_Workshop_Doctor_Pharmacy_and_Advice.pptx
@@ -523,7 +523,11 @@
           <a:lstStyle/>
           <a:p>
             <a:r>
-              <a:rPr lang="en-US" dirty="0"/>
+              <a:rPr lang="ar-SA" dirty="0">
+                <a:latin typeface="Amiri" pitchFamily="2" charset="-78"/>
+                <a:ea typeface="Amiri" pitchFamily="2" charset="-78"/>
+                <a:cs typeface="Amiri" pitchFamily="2" charset="-78"/>
+              </a:rPr>
               <a:t>WORKSHOP AT A GLANCE — 60 minutes on Teams, mostly in breakout rooms of three.
 0–2 Welcome · 2–6 How Paper 3 works · 6–10 Language bank · 10–13 Breakout routine · 13–33 Role plays A–D in rooms (rotate roles) · 33–37 Role-play models (main room) · 37–50 Topic conversation in rooms · 50–55 Conversation models · 55–58 Feedback + self-check · 58–60 Close.
 Content: teacher-made exam scenarios for Advanced Topic A, Lesson 8 (Doctor, Pharmacy and Advice, AT-A-L08), using that lesson’s language (advice with أَنْ + subjunctive; polite requests; medicine instructions). Every task has Core · Develop · Stretch support and a model answer.
@@ -615,7 +619,11 @@
           <a:lstStyle/>
           <a:p>
             <a:r>
-              <a:rPr lang="en-US" dirty="0"/>
+              <a:rPr lang="ar-SA" dirty="0">
+                <a:latin typeface="Amiri" pitchFamily="2" charset="-78"/>
+                <a:ea typeface="Amiri" pitchFamily="2" charset="-78"/>
+                <a:cs typeface="Amiri" pitchFamily="2" charset="-78"/>
+              </a:rPr>
               <a:t>ROLE PLAY C (Develop) — in the doctor’s room.
 SET-UP IN THE BREAKOUT ROOM: A = examiner (reads the left column ONLY — the questions, in order), B = candidate (sees the task column; Core may use the help column), C = observer (ticks the feedback checklist). 1 minute preparation, about 3 minutes speaking, 1 minute feedback, then rotate.
 Task ! is the unexpected question: in the exam the candidate has not seen it — the examiner should read it without warning.
@@ -707,7 +715,11 @@
           <a:lstStyle/>
           <a:p>
             <a:r>
-              <a:rPr lang="en-US" dirty="0"/>
+              <a:rPr lang="ar-SA" dirty="0">
+                <a:latin typeface="Amiri" pitchFamily="2" charset="-78"/>
+                <a:ea typeface="Amiri" pitchFamily="2" charset="-78"/>
+                <a:cs typeface="Amiri" pitchFamily="2" charset="-78"/>
+              </a:rPr>
               <a:t>ROLE PLAY D (Stretch) — a radio phone-in.
 SET-UP IN THE BREAKOUT ROOM: A = examiner (reads the left column ONLY — the questions, in order), B = candidate (sees the task column; Core may use the help column), C = observer (ticks the feedback checklist). 1 minute preparation, about 3 minutes speaking, 1 minute feedback, then rotate.
 Task ! is the unexpected question: in the exam the candidate has not seen it — the examiner should read it without warning.
@@ -1243,7 +1255,11 @@
           <a:lstStyle/>
           <a:p>
             <a:r>
-              <a:rPr lang="en-US" dirty="0"/>
+              <a:rPr lang="ar-SA" dirty="0">
+                <a:latin typeface="Amiri" pitchFamily="2" charset="-78"/>
+                <a:ea typeface="Amiri" pitchFamily="2" charset="-78"/>
+                <a:cs typeface="Amiri" pitchFamily="2" charset="-78"/>
+              </a:rPr>
               <a:t>TOPIC CONVERSATION — Core. Examiner asks the questions in order and may add “لِمَاذَا؟ / هَلْ يُمْكِنُ أَنْ تَشْرَحَ أَكْثَرَ؟” to push for more. Candidate aims for one full sentence per question.
 </a:t>
             </a:r>
@@ -1332,7 +1348,11 @@
           <a:lstStyle/>
           <a:p>
             <a:r>
-              <a:rPr lang="en-US" dirty="0"/>
+              <a:rPr lang="ar-SA" dirty="0">
+                <a:latin typeface="Amiri" pitchFamily="2" charset="-78"/>
+                <a:ea typeface="Amiri" pitchFamily="2" charset="-78"/>
+                <a:cs typeface="Amiri" pitchFamily="2" charset="-78"/>
+              </a:rPr>
               <a:t>TOPIC CONVERSATION — Develop. Examiner asks the questions in order and may add “لِمَاذَا؟ / هَلْ يُمْكِنُ أَنْ تَشْرَحَ أَكْثَرَ؟” to push for more. Candidate aims for two or three sentences, with advice and a past experience.
 </a:t>
             </a:r>
@@ -1421,7 +1441,11 @@
           <a:lstStyle/>
           <a:p>
             <a:r>
-              <a:rPr lang="en-US" dirty="0"/>
+              <a:rPr lang="ar-SA" dirty="0">
+                <a:latin typeface="Amiri" pitchFamily="2" charset="-78"/>
+                <a:ea typeface="Amiri" pitchFamily="2" charset="-78"/>
+                <a:cs typeface="Amiri" pitchFamily="2" charset="-78"/>
+              </a:rPr>
               <a:t>TOPIC CONVERSATION — Stretch. Examiner asks the questions in order and may add “لِمَاذَا؟ / هَلْ يُمْكِنُ أَنْ تَشْرَحَ أَكْثَرَ؟” to push for more. Candidate aims for a developed answer: opinion, comparison, concession and a conditional.
 </a:t>
             </a:r>
@@ -1510,7 +1534,11 @@
           <a:lstStyle/>
           <a:p>
             <a:r>
-              <a:rPr lang="en-US" dirty="0"/>
+              <a:rPr lang="ar-SA" dirty="0">
+                <a:latin typeface="Amiri" pitchFamily="2" charset="-78"/>
+                <a:ea typeface="Amiri" pitchFamily="2" charset="-78"/>
+                <a:cs typeface="Amiri" pitchFamily="2" charset="-78"/>
+              </a:rPr>
               <a:t>WELCOME (1 min) — while students join.
 • Greet each student by name as they arrive: السَّلَامُ عَلَيْكُمْ. Take the register (Pastoral Tracker: attendance 0/1).
 • 2-MINUTE CHECK-IN (SEND training): a private chat to any student who seemed unsettled last lesson — “Are you okay today? 👍 / 👎”.
@@ -2224,7 +2252,11 @@
           <a:lstStyle/>
           <a:p>
             <a:r>
-              <a:rPr lang="en-US" dirty="0"/>
+              <a:rPr lang="ar-SA" dirty="0">
+                <a:latin typeface="Amiri" pitchFamily="2" charset="-78"/>
+                <a:ea typeface="Amiri" pitchFamily="2" charset="-78"/>
+                <a:cs typeface="Amiri" pitchFamily="2" charset="-78"/>
+              </a:rPr>
               <a:t>TEACH (3 min). Role play = precise and complete; conversation = develop. Choral repetition of the repair phrases. To a girl: تُعِيدِي.</a:t>
             </a:r>
             <a:endParaRPr lang="en-US" dirty="0"/>
@@ -2312,7 +2344,11 @@
           <a:lstStyle/>
           <a:p>
             <a:r>
-              <a:rPr lang="en-US" dirty="0"/>
+              <a:rPr lang="ar-SA" dirty="0">
+                <a:latin typeface="Amiri" pitchFamily="2" charset="-78"/>
+                <a:ea typeface="Amiri" pitchFamily="2" charset="-78"/>
+                <a:cs typeface="Amiri" pitchFamily="2" charset="-78"/>
+              </a:rPr>
               <a:t>LANGUAGE BANK (2 min) — broken plurals to learn by heart: أَطِبَّاءُ · صَيَادِلَةٌ · مَوَاعِيدُ · أَدْوِيَةٌ. The place: الصَّيْدَلِيَّةُ (the pharmacy) — same spelling as the female pharmacist.</a:t>
             </a:r>
             <a:endParaRPr lang="en-US" dirty="0"/>
@@ -2400,7 +2436,11 @@
           <a:lstStyle/>
           <a:p>
             <a:r>
-              <a:rPr lang="en-US" dirty="0"/>
+              <a:rPr lang="ar-SA" dirty="0">
+                <a:latin typeface="Amiri" pitchFamily="2" charset="-78"/>
+                <a:ea typeface="Amiri" pitchFamily="2" charset="-78"/>
+                <a:cs typeface="Amiri" pitchFamily="2" charset="-78"/>
+              </a:rPr>
               <a:t>LANGUAGE BANK (2 min) — three ways to advise: يَجِبُ أَنْ تَرْتَاحَ · أَنْصَحُكَ بِأَنْ تَرْتَاحَ · ارْتَحْ! Polite request: هَلْ يُمْكِنُ أَنْ أَحْجِزَ مَوْعِدًا؟</a:t>
             </a:r>
             <a:endParaRPr lang="en-US" dirty="0"/>
@@ -2576,7 +2616,11 @@
           <a:lstStyle/>
           <a:p>
             <a:r>
-              <a:rPr lang="en-US" dirty="0"/>
+              <a:rPr lang="ar-SA" dirty="0">
+                <a:latin typeface="Amiri" pitchFamily="2" charset="-78"/>
+                <a:ea typeface="Amiri" pitchFamily="2" charset="-78"/>
+                <a:cs typeface="Amiri" pitchFamily="2" charset="-78"/>
+              </a:rPr>
               <a:t>ROLE PLAY A (Core) — phoning the clinic.
 SET-UP IN THE BREAKOUT ROOM: A = examiner (reads the left column ONLY — the questions, in order), B = candidate (sees the task column; Core may use the help column), C = observer (ticks the feedback checklist). 1 minute preparation, about 3 minutes speaking, 1 minute feedback, then rotate.
 Task ! is the unexpected question: in the exam the candidate has not seen it — the examiner should read it without warning.
@@ -2668,7 +2712,11 @@
           <a:lstStyle/>
           <a:p>
             <a:r>
-              <a:rPr lang="en-US" dirty="0"/>
+              <a:rPr lang="ar-SA" dirty="0">
+                <a:latin typeface="Amiri" pitchFamily="2" charset="-78"/>
+                <a:ea typeface="Amiri" pitchFamily="2" charset="-78"/>
+                <a:cs typeface="Amiri" pitchFamily="2" charset="-78"/>
+              </a:rPr>
               <a:t>ROLE PLAY B (Core+) — at the pharmacy.
 SET-UP IN THE BREAKOUT ROOM: A = examiner (reads the left column ONLY — the questions, in order), B = candidate (sees the task column; Core may use the help column), C = observer (ticks the feedback checklist). 1 minute preparation, about 3 minutes speaking, 1 minute feedback, then rotate.
 Task ! is the unexpected question: in the exam the candidate has not seen it — the examiner should read it without warning.
@@ -3156,6 +3204,7 @@
                   <a:srgbClr val="D4AF37"/>
                 </a:solidFill>
                 <a:latin typeface="Amiri" pitchFamily="2" charset="-78"/>
+                <a:ea typeface="Amiri" pitchFamily="2" charset="-78"/>
                 <a:cs typeface="Amiri" pitchFamily="2" charset="-78"/>
               </a:rPr>
               <a:t>م</a:t>
@@ -3362,6 +3411,7 @@
                   <a:srgbClr val="D4AF37"/>
                 </a:solidFill>
                 <a:latin typeface="Amiri" pitchFamily="2" charset="-78"/>
+                <a:ea typeface="Amiri" pitchFamily="2" charset="-78"/>
                 <a:cs typeface="Amiri" pitchFamily="2" charset="-78"/>
               </a:rPr>
               <a:t>وَرْشَةُ التَّحَدُّثِ — عِنْدَ الطَّبِيبِ وَفِي الصَّيْدَلِيَّةِ</a:t>
@@ -3819,6 +3869,7 @@
                   <a:srgbClr val="D4AF37"/>
                 </a:solidFill>
                 <a:latin typeface="Amiri" pitchFamily="2" charset="-78"/>
+                <a:ea typeface="Amiri" pitchFamily="2" charset="-78"/>
                 <a:cs typeface="Amiri" pitchFamily="2" charset="-78"/>
               </a:rPr>
               <a:t>م</a:t>
@@ -4139,6 +4190,7 @@
                   <a:srgbClr val="8A6D1E"/>
                 </a:solidFill>
                 <a:latin typeface="Amiri" pitchFamily="2" charset="-78"/>
+                <a:ea typeface="Amiri" pitchFamily="2" charset="-78"/>
                 <a:cs typeface="Amiri" pitchFamily="2" charset="-78"/>
               </a:rPr>
               <a:t>فِي غُرْفَةِ الطَّبِيبِ</a:t>
@@ -4419,6 +4471,7 @@
                   <a:srgbClr val="1B3B6F"/>
                 </a:solidFill>
                 <a:latin typeface="Amiri" pitchFamily="2" charset="-78"/>
+                <a:ea typeface="Amiri" pitchFamily="2" charset="-78"/>
                 <a:cs typeface="Amiri" pitchFamily="2" charset="-78"/>
               </a:rPr>
               <a:t>عِنْدِي … وَ… مُنْذُ …</a:t>
@@ -4495,6 +4548,7 @@
                   <a:srgbClr val="1B3B6F"/>
                 </a:solidFill>
                 <a:latin typeface="Amiri" pitchFamily="2" charset="-78"/>
+                <a:ea typeface="Amiri" pitchFamily="2" charset="-78"/>
                 <a:cs typeface="Amiri" pitchFamily="2" charset="-78"/>
               </a:rPr>
               <a:t>تَفَضَّلْ اجْلِسْ. مَاذَا بِكَ؟</a:t>
@@ -4598,6 +4652,7 @@
                   <a:srgbClr val="1B3B6F"/>
                 </a:solidFill>
                 <a:latin typeface="Amiri" pitchFamily="2" charset="-78"/>
+                <a:ea typeface="Amiri" pitchFamily="2" charset="-78"/>
                 <a:cs typeface="Amiri" pitchFamily="2" charset="-78"/>
               </a:rPr>
               <a:t>أَدْرُسُ … وَأَنَامُ … فَقَطْ</a:t>
@@ -4674,6 +4729,7 @@
                   <a:srgbClr val="1B3B6F"/>
                 </a:solidFill>
                 <a:latin typeface="Amiri" pitchFamily="2" charset="-78"/>
+                <a:ea typeface="Amiri" pitchFamily="2" charset="-78"/>
                 <a:cs typeface="Amiri" pitchFamily="2" charset="-78"/>
               </a:rPr>
               <a:t>هَلْ تَنَامُ جَيِّدًا؟ وَكَمْ سَاعَةً تَدْرُسُ؟</a:t>
@@ -4777,6 +4833,7 @@
                   <a:srgbClr val="1B3B6F"/>
                 </a:solidFill>
                 <a:latin typeface="Amiri" pitchFamily="2" charset="-78"/>
+                <a:ea typeface="Amiri" pitchFamily="2" charset="-78"/>
                 <a:cs typeface="Amiri" pitchFamily="2" charset="-78"/>
               </a:rPr>
               <a:t>وَمَاذَا أَيْضًا …؟</a:t>
@@ -4853,6 +4910,7 @@
                   <a:srgbClr val="1B3B6F"/>
                 </a:solidFill>
                 <a:latin typeface="Amiri" pitchFamily="2" charset="-78"/>
+                <a:ea typeface="Amiri" pitchFamily="2" charset="-78"/>
                 <a:cs typeface="Amiri" pitchFamily="2" charset="-78"/>
               </a:rPr>
               <a:t>أَنْصَحُكَ بِأَنْ تَنَامَ ثَمَانِيَ سَاعَاتٍ.</a:t>
@@ -4956,6 +5014,7 @@
                   <a:srgbClr val="1B3B6F"/>
                 </a:solidFill>
                 <a:latin typeface="Amiri" pitchFamily="2" charset="-78"/>
+                <a:ea typeface="Amiri" pitchFamily="2" charset="-78"/>
                 <a:cs typeface="Amiri" pitchFamily="2" charset="-78"/>
               </a:rPr>
               <a:t>سَأَشْرَبُ … وَسَآخُذُ …</a:t>
@@ -5032,6 +5091,7 @@
                   <a:srgbClr val="1B3B6F"/>
                 </a:solidFill>
                 <a:latin typeface="Amiri" pitchFamily="2" charset="-78"/>
+                <a:ea typeface="Amiri" pitchFamily="2" charset="-78"/>
                 <a:cs typeface="Amiri" pitchFamily="2" charset="-78"/>
               </a:rPr>
               <a:t>اشْرَبِ المَاءَ، وَخُذْ هٰذِهِ الحُبُوبَ عِنْدَ الصُّدَاعِ فَقَطْ.</a:t>
@@ -5135,6 +5195,7 @@
                   <a:srgbClr val="1B3B6F"/>
                 </a:solidFill>
                 <a:latin typeface="Amiri" pitchFamily="2" charset="-78"/>
+                <a:ea typeface="Amiri" pitchFamily="2" charset="-78"/>
                 <a:cs typeface="Amiri" pitchFamily="2" charset="-78"/>
               </a:rPr>
               <a:t>كُنْتُ … لٰكِنِّي الآنَ …</a:t>
@@ -5211,6 +5272,7 @@
                   <a:srgbClr val="1B3B6F"/>
                 </a:solidFill>
                 <a:latin typeface="Amiri" pitchFamily="2" charset="-78"/>
+                <a:ea typeface="Amiri" pitchFamily="2" charset="-78"/>
                 <a:cs typeface="Amiri" pitchFamily="2" charset="-78"/>
               </a:rPr>
               <a:t>هَلْ تُمَارِسُ أَيَّ رِيَاضَةٍ هٰذِهِ الأَيَّامَ؟</a:t>
@@ -5420,6 +5482,7 @@
                   <a:srgbClr val="D4AF37"/>
                 </a:solidFill>
                 <a:latin typeface="Amiri" pitchFamily="2" charset="-78"/>
+                <a:ea typeface="Amiri" pitchFamily="2" charset="-78"/>
                 <a:cs typeface="Amiri" pitchFamily="2" charset="-78"/>
               </a:rPr>
               <a:t>م</a:t>
@@ -5740,6 +5803,7 @@
                   <a:srgbClr val="8A6D1E"/>
                 </a:solidFill>
                 <a:latin typeface="Amiri" pitchFamily="2" charset="-78"/>
+                <a:ea typeface="Amiri" pitchFamily="2" charset="-78"/>
                 <a:cs typeface="Amiri" pitchFamily="2" charset="-78"/>
               </a:rPr>
               <a:t>بَرْنَامَجٌ صِحِّيٌّ فِي الرَّادْيُو</a:t>
@@ -6020,6 +6084,7 @@
                   <a:srgbClr val="1B3B6F"/>
                 </a:solidFill>
                 <a:latin typeface="Amiri" pitchFamily="2" charset="-78"/>
+                <a:ea typeface="Amiri" pitchFamily="2" charset="-78"/>
                 <a:cs typeface="Amiri" pitchFamily="2" charset="-78"/>
               </a:rPr>
               <a:t>أَشْعُرُ بِالتَّعَبِ … مِمَّا يُؤَثِّرُ فِي …</a:t>
@@ -6096,6 +6161,7 @@
                   <a:srgbClr val="1B3B6F"/>
                 </a:solidFill>
                 <a:latin typeface="Amiri" pitchFamily="2" charset="-78"/>
+                <a:ea typeface="Amiri" pitchFamily="2" charset="-78"/>
                 <a:cs typeface="Amiri" pitchFamily="2" charset="-78"/>
               </a:rPr>
               <a:t>أَهْلًا بِكَ فِي البَرْنَامَجِ. مَا سُؤَالُكَ؟</a:t>
@@ -6199,6 +6265,7 @@
                   <a:srgbClr val="1B3B6F"/>
                 </a:solidFill>
                 <a:latin typeface="Amiri" pitchFamily="2" charset="-78"/>
+                <a:ea typeface="Amiri" pitchFamily="2" charset="-78"/>
                 <a:cs typeface="Amiri" pitchFamily="2" charset="-78"/>
               </a:rPr>
               <a:t>جَرَّبْتُ أَنْ … لٰكِنْ …</a:t>
@@ -6275,6 +6342,7 @@
                   <a:srgbClr val="1B3B6F"/>
                 </a:solidFill>
                 <a:latin typeface="Amiri" pitchFamily="2" charset="-78"/>
+                <a:ea typeface="Amiri" pitchFamily="2" charset="-78"/>
                 <a:cs typeface="Amiri" pitchFamily="2" charset="-78"/>
               </a:rPr>
               <a:t>مَاذَا جَرَّبْتَ حَتَّى الآنَ؟</a:t>
@@ -6378,6 +6446,7 @@
                   <a:srgbClr val="1B3B6F"/>
                 </a:solidFill>
                 <a:latin typeface="Amiri" pitchFamily="2" charset="-78"/>
+                <a:ea typeface="Amiri" pitchFamily="2" charset="-78"/>
                 <a:cs typeface="Amiri" pitchFamily="2" charset="-78"/>
               </a:rPr>
               <a:t>لَا، لِأَنِّي أَعْتَقِدُ أَنَّ …</a:t>
@@ -6454,6 +6523,7 @@
                   <a:srgbClr val="1B3B6F"/>
                 </a:solidFill>
                 <a:latin typeface="Amiri" pitchFamily="2" charset="-78"/>
+                <a:ea typeface="Amiri" pitchFamily="2" charset="-78"/>
                 <a:cs typeface="Amiri" pitchFamily="2" charset="-78"/>
               </a:rPr>
               <a:t>هَلْ تَأْخُذُ فِيتَامِينَاتٍ بِدُونِ اسْتِشَارَةٍ؟</a:t>
@@ -6557,6 +6627,7 @@
                   <a:srgbClr val="1B3B6F"/>
                 </a:solidFill>
                 <a:latin typeface="Amiri" pitchFamily="2" charset="-78"/>
+                <a:ea typeface="Amiri" pitchFamily="2" charset="-78"/>
                 <a:cs typeface="Amiri" pitchFamily="2" charset="-78"/>
               </a:rPr>
               <a:t>صَحِيحٌ أَنَّ … غَيْرَ أَنَّ … فَكَيْفَ …؟</a:t>
@@ -6633,6 +6704,7 @@
                   <a:srgbClr val="1B3B6F"/>
                 </a:solidFill>
                 <a:latin typeface="Amiri" pitchFamily="2" charset="-78"/>
+                <a:ea typeface="Amiri" pitchFamily="2" charset="-78"/>
                 <a:cs typeface="Amiri" pitchFamily="2" charset="-78"/>
               </a:rPr>
               <a:t>أَنْصَحُكَ بِأَنْ تُنَظِّمَ نَوْمَكَ وَتَتْرُكَ القَهْوَةَ.</a:t>
@@ -6736,6 +6808,7 @@
                   <a:srgbClr val="1B3B6F"/>
                 </a:solidFill>
                 <a:latin typeface="Amiri" pitchFamily="2" charset="-78"/>
+                <a:ea typeface="Amiri" pitchFamily="2" charset="-78"/>
                 <a:cs typeface="Amiri" pitchFamily="2" charset="-78"/>
               </a:rPr>
               <a:t>لَوْ كُنْتُ …، لَفَتَحْتُ …</a:t>
@@ -6812,6 +6885,7 @@
                   <a:srgbClr val="1B3B6F"/>
                 </a:solidFill>
                 <a:latin typeface="Amiri" pitchFamily="2" charset="-78"/>
+                <a:ea typeface="Amiri" pitchFamily="2" charset="-78"/>
                 <a:cs typeface="Amiri" pitchFamily="2" charset="-78"/>
               </a:rPr>
               <a:t>لَوْ كُنْتَ وَزِيرَ الصِّحَّةِ، مَاذَا تَفْعَلُ لِلشَّبَابِ؟</a:t>
@@ -7021,6 +7095,7 @@
                   <a:srgbClr val="D4AF37"/>
                 </a:solidFill>
                 <a:latin typeface="Amiri" pitchFamily="2" charset="-78"/>
+                <a:ea typeface="Amiri" pitchFamily="2" charset="-78"/>
                 <a:cs typeface="Amiri" pitchFamily="2" charset="-78"/>
               </a:rPr>
               <a:t>م</a:t>
@@ -7341,6 +7416,7 @@
                   <a:srgbClr val="8A6D1E"/>
                 </a:solidFill>
                 <a:latin typeface="Amiri" pitchFamily="2" charset="-78"/>
+                <a:ea typeface="Amiri" pitchFamily="2" charset="-78"/>
                 <a:cs typeface="Amiri" pitchFamily="2" charset="-78"/>
               </a:rPr>
               <a:t>وَرَقَةُ المُلَاحِظِ</a:t>
@@ -8811,6 +8887,7 @@
                   <a:srgbClr val="D4AF37"/>
                 </a:solidFill>
                 <a:latin typeface="Amiri" pitchFamily="2" charset="-78"/>
+                <a:ea typeface="Amiri" pitchFamily="2" charset="-78"/>
                 <a:cs typeface="Amiri" pitchFamily="2" charset="-78"/>
               </a:rPr>
               <a:t>م</a:t>
@@ -9131,6 +9208,7 @@
                   <a:srgbClr val="8A6D1E"/>
                 </a:solidFill>
                 <a:latin typeface="Amiri" pitchFamily="2" charset="-78"/>
+                <a:ea typeface="Amiri" pitchFamily="2" charset="-78"/>
                 <a:cs typeface="Amiri" pitchFamily="2" charset="-78"/>
               </a:rPr>
               <a:t>نَمُوذَجُ الإِجَابَةِ</a:t>
@@ -9373,6 +9451,7 @@
                   <a:srgbClr val="1B3B6F"/>
                 </a:solidFill>
                 <a:latin typeface="Amiri" pitchFamily="2" charset="-78"/>
+                <a:ea typeface="Amiri" pitchFamily="2" charset="-78"/>
                 <a:cs typeface="Amiri" pitchFamily="2" charset="-78"/>
               </a:rPr>
               <a:t>صَبَاحُ الخَيْرِ، هَلْ يُمْكِنُ أَنْ أَحْجِزَ مَوْعِدًا مَعَ الطَّبِيبِ؟</a:t>
@@ -9449,6 +9528,7 @@
                   <a:srgbClr val="1B3B6F"/>
                 </a:solidFill>
                 <a:latin typeface="Amiri" pitchFamily="2" charset="-78"/>
+                <a:ea typeface="Amiri" pitchFamily="2" charset="-78"/>
                 <a:cs typeface="Amiri" pitchFamily="2" charset="-78"/>
               </a:rPr>
               <a:t>عِيَادَةُ الشِّفَاءِ، كَيْفَ أُسَاعِدُكَ؟</a:t>
@@ -9552,6 +9632,7 @@
                   <a:srgbClr val="1B3B6F"/>
                 </a:solidFill>
                 <a:latin typeface="Amiri" pitchFamily="2" charset="-78"/>
+                <a:ea typeface="Amiri" pitchFamily="2" charset="-78"/>
                 <a:cs typeface="Amiri" pitchFamily="2" charset="-78"/>
               </a:rPr>
               <a:t>اسْمِي يُوسُفُ، وَعُمْرِي خَمْسَ عَشْرَةَ سَنَةً.</a:t>
@@ -9628,6 +9709,7 @@
                   <a:srgbClr val="1B3B6F"/>
                 </a:solidFill>
                 <a:latin typeface="Amiri" pitchFamily="2" charset="-78"/>
+                <a:ea typeface="Amiri" pitchFamily="2" charset="-78"/>
                 <a:cs typeface="Amiri" pitchFamily="2" charset="-78"/>
               </a:rPr>
               <a:t>مَا اسْمُكَ وَعُمْرُكَ؟</a:t>
@@ -9731,6 +9813,7 @@
                   <a:srgbClr val="1B3B6F"/>
                 </a:solidFill>
                 <a:latin typeface="Amiri" pitchFamily="2" charset="-78"/>
+                <a:ea typeface="Amiri" pitchFamily="2" charset="-78"/>
                 <a:cs typeface="Amiri" pitchFamily="2" charset="-78"/>
               </a:rPr>
               <a:t>عِنْدِي حُمَّى، وَيُؤْلِمُنِي حَلْقِي مُنْذُ ثَلَاثَةِ أَيَّامٍ.</a:t>
@@ -9807,6 +9890,7 @@
                   <a:srgbClr val="1B3B6F"/>
                 </a:solidFill>
                 <a:latin typeface="Amiri" pitchFamily="2" charset="-78"/>
+                <a:ea typeface="Amiri" pitchFamily="2" charset="-78"/>
                 <a:cs typeface="Amiri" pitchFamily="2" charset="-78"/>
               </a:rPr>
               <a:t>مَا المُشْكِلَةُ؟</a:t>
@@ -9910,6 +9994,7 @@
                   <a:srgbClr val="1B3B6F"/>
                 </a:solidFill>
                 <a:latin typeface="Amiri" pitchFamily="2" charset="-78"/>
+                <a:ea typeface="Amiri" pitchFamily="2" charset="-78"/>
                 <a:cs typeface="Amiri" pitchFamily="2" charset="-78"/>
               </a:rPr>
               <a:t>أُفَضِّلُ السَّاعَةَ الرَّابِعَةَ، لِأَنَّ عِنْدِي امْتِحَانًا فِي الصَّبَاحِ.</a:t>
@@ -9986,6 +10071,7 @@
                   <a:srgbClr val="1B3B6F"/>
                 </a:solidFill>
                 <a:latin typeface="Amiri" pitchFamily="2" charset="-78"/>
+                <a:ea typeface="Amiri" pitchFamily="2" charset="-78"/>
                 <a:cs typeface="Amiri" pitchFamily="2" charset="-78"/>
               </a:rPr>
               <a:t>عِنْدَنَا مَوْعِدٌ غَدًا فِي العَاشِرَةِ أَوْ فِي الرَّابِعَةِ.</a:t>
@@ -10089,6 +10175,7 @@
                   <a:srgbClr val="1B3B6F"/>
                 </a:solidFill>
                 <a:latin typeface="Amiri" pitchFamily="2" charset="-78"/>
+                <a:ea typeface="Amiri" pitchFamily="2" charset="-78"/>
                 <a:cs typeface="Amiri" pitchFamily="2" charset="-78"/>
               </a:rPr>
               <a:t>لَا، لَيْسَ عِنْدِي حَسَاسِيَّةٌ مِنْ أَيِّ دَوَاءٍ.</a:t>
@@ -10165,6 +10252,7 @@
                   <a:srgbClr val="1B3B6F"/>
                 </a:solidFill>
                 <a:latin typeface="Amiri" pitchFamily="2" charset="-78"/>
+                <a:ea typeface="Amiri" pitchFamily="2" charset="-78"/>
                 <a:cs typeface="Amiri" pitchFamily="2" charset="-78"/>
               </a:rPr>
               <a:t>هَلْ عِنْدَكَ حَسَاسِيَّةٌ مِنْ أَيِّ دَوَاءٍ؟</a:t>
@@ -10374,6 +10462,7 @@
                   <a:srgbClr val="D4AF37"/>
                 </a:solidFill>
                 <a:latin typeface="Amiri" pitchFamily="2" charset="-78"/>
+                <a:ea typeface="Amiri" pitchFamily="2" charset="-78"/>
                 <a:cs typeface="Amiri" pitchFamily="2" charset="-78"/>
               </a:rPr>
               <a:t>م</a:t>
@@ -10694,6 +10783,7 @@
                   <a:srgbClr val="8A6D1E"/>
                 </a:solidFill>
                 <a:latin typeface="Amiri" pitchFamily="2" charset="-78"/>
+                <a:ea typeface="Amiri" pitchFamily="2" charset="-78"/>
                 <a:cs typeface="Amiri" pitchFamily="2" charset="-78"/>
               </a:rPr>
               <a:t>نَمُوذَجُ الإِجَابَةِ</a:t>
@@ -10936,6 +11026,7 @@
                   <a:srgbClr val="1B3B6F"/>
                 </a:solidFill>
                 <a:latin typeface="Amiri" pitchFamily="2" charset="-78"/>
+                <a:ea typeface="Amiri" pitchFamily="2" charset="-78"/>
                 <a:cs typeface="Amiri" pitchFamily="2" charset="-78"/>
               </a:rPr>
               <a:t>أُرِيدُ دَوَاءً لِلسُّعَالِ لِأَخِي الصَّغِيرِ، مِنْ فَضْلِكِ.</a:t>
@@ -11012,6 +11103,7 @@
                   <a:srgbClr val="1B3B6F"/>
                 </a:solidFill>
                 <a:latin typeface="Amiri" pitchFamily="2" charset="-78"/>
+                <a:ea typeface="Amiri" pitchFamily="2" charset="-78"/>
                 <a:cs typeface="Amiri" pitchFamily="2" charset="-78"/>
               </a:rPr>
               <a:t>أَهْلًا، تَفَضَّلْ.</a:t>
@@ -11115,6 +11207,7 @@
                   <a:srgbClr val="1B3B6F"/>
                 </a:solidFill>
                 <a:latin typeface="Amiri" pitchFamily="2" charset="-78"/>
+                <a:ea typeface="Amiri" pitchFamily="2" charset="-78"/>
                 <a:cs typeface="Amiri" pitchFamily="2" charset="-78"/>
               </a:rPr>
               <a:t>عُمْرُهُ سَبْعُ سَنَوَاتٍ.</a:t>
@@ -11191,6 +11284,7 @@
                   <a:srgbClr val="1B3B6F"/>
                 </a:solidFill>
                 <a:latin typeface="Amiri" pitchFamily="2" charset="-78"/>
+                <a:ea typeface="Amiri" pitchFamily="2" charset="-78"/>
                 <a:cs typeface="Amiri" pitchFamily="2" charset="-78"/>
               </a:rPr>
               <a:t>كَمْ عُمْرُهُ؟</a:t>
@@ -11294,6 +11388,7 @@
                   <a:srgbClr val="1B3B6F"/>
                 </a:solidFill>
                 <a:latin typeface="Amiri" pitchFamily="2" charset="-78"/>
+                <a:ea typeface="Amiri" pitchFamily="2" charset="-78"/>
                 <a:cs typeface="Amiri" pitchFamily="2" charset="-78"/>
               </a:rPr>
               <a:t>كَمْ مَرَّةً يَجِبُ أَنْ يَأْخُذَهُ فِي اليَوْمِ؟</a:t>
@@ -11370,6 +11465,7 @@
                   <a:srgbClr val="1B3B6F"/>
                 </a:solidFill>
                 <a:latin typeface="Amiri" pitchFamily="2" charset="-78"/>
+                <a:ea typeface="Amiri" pitchFamily="2" charset="-78"/>
                 <a:cs typeface="Amiri" pitchFamily="2" charset="-78"/>
               </a:rPr>
               <a:t>هٰذَا الشَّرَابُ مُنَاسِبٌ.</a:t>
@@ -11473,6 +11569,7 @@
                   <a:srgbClr val="1B3B6F"/>
                 </a:solidFill>
                 <a:latin typeface="Amiri" pitchFamily="2" charset="-78"/>
+                <a:ea typeface="Amiri" pitchFamily="2" charset="-78"/>
                 <a:cs typeface="Amiri" pitchFamily="2" charset="-78"/>
               </a:rPr>
               <a:t>إِذَنْ، مِلْعَقَةً وَاحِدَةً ثَلَاثَ مَرَّاتٍ فِي اليَوْمِ، بَعْدَ الأَكْلِ. شُكْرًا.</a:t>
@@ -11549,6 +11646,7 @@
                   <a:srgbClr val="1B3B6F"/>
                 </a:solidFill>
                 <a:latin typeface="Amiri" pitchFamily="2" charset="-78"/>
+                <a:ea typeface="Amiri" pitchFamily="2" charset="-78"/>
                 <a:cs typeface="Amiri" pitchFamily="2" charset="-78"/>
               </a:rPr>
               <a:t>مِلْعَقَةً ثَلَاثَ مَرَّاتٍ فِي اليَوْمِ، بَعْدَ الأَكْلِ.</a:t>
@@ -11652,6 +11750,7 @@
                   <a:srgbClr val="1B3B6F"/>
                 </a:solidFill>
                 <a:latin typeface="Amiri" pitchFamily="2" charset="-78"/>
+                <a:ea typeface="Amiri" pitchFamily="2" charset="-78"/>
                 <a:cs typeface="Amiri" pitchFamily="2" charset="-78"/>
               </a:rPr>
               <a:t>لَا، شُكْرًا. بِكَمْ هٰذَا الشَّرَابُ؟</a:t>
@@ -11728,6 +11827,7 @@
                   <a:srgbClr val="1B3B6F"/>
                 </a:solidFill>
                 <a:latin typeface="Amiri" pitchFamily="2" charset="-78"/>
+                <a:ea typeface="Amiri" pitchFamily="2" charset="-78"/>
                 <a:cs typeface="Amiri" pitchFamily="2" charset="-78"/>
               </a:rPr>
               <a:t>هَلْ تُرِيدُ شَيْئًا آخَرَ؟</a:t>
@@ -11937,6 +12037,7 @@
                   <a:srgbClr val="D4AF37"/>
                 </a:solidFill>
                 <a:latin typeface="Amiri" pitchFamily="2" charset="-78"/>
+                <a:ea typeface="Amiri" pitchFamily="2" charset="-78"/>
                 <a:cs typeface="Amiri" pitchFamily="2" charset="-78"/>
               </a:rPr>
               <a:t>م</a:t>
@@ -12257,6 +12358,7 @@
                   <a:srgbClr val="8A6D1E"/>
                 </a:solidFill>
                 <a:latin typeface="Amiri" pitchFamily="2" charset="-78"/>
+                <a:ea typeface="Amiri" pitchFamily="2" charset="-78"/>
                 <a:cs typeface="Amiri" pitchFamily="2" charset="-78"/>
               </a:rPr>
               <a:t>نَمُوذَجُ الإِجَابَةِ</a:t>
@@ -12499,6 +12601,7 @@
                   <a:srgbClr val="1B3B6F"/>
                 </a:solidFill>
                 <a:latin typeface="Amiri" pitchFamily="2" charset="-78"/>
+                <a:ea typeface="Amiri" pitchFamily="2" charset="-78"/>
                 <a:cs typeface="Amiri" pitchFamily="2" charset="-78"/>
               </a:rPr>
               <a:t>عِنْدِي صُدَاعٌ شَدِيدٌ وَدُوَارٌ مُنْذُ يَوْمِ الأَحَدِ.</a:t>
@@ -12575,6 +12678,7 @@
                   <a:srgbClr val="1B3B6F"/>
                 </a:solidFill>
                 <a:latin typeface="Amiri" pitchFamily="2" charset="-78"/>
+                <a:ea typeface="Amiri" pitchFamily="2" charset="-78"/>
                 <a:cs typeface="Amiri" pitchFamily="2" charset="-78"/>
               </a:rPr>
               <a:t>تَفَضَّلْ اجْلِسْ. مَاذَا بِكَ؟</a:t>
@@ -12678,6 +12782,7 @@
                   <a:srgbClr val="1B3B6F"/>
                 </a:solidFill>
                 <a:latin typeface="Amiri" pitchFamily="2" charset="-78"/>
+                <a:ea typeface="Amiri" pitchFamily="2" charset="-78"/>
                 <a:cs typeface="Amiri" pitchFamily="2" charset="-78"/>
               </a:rPr>
               <a:t>لَا، أَدْرُسُ حَتَّى مُنْتَصَفِ اللَّيْلِ لِلِامْتِحَانَاتِ، وَأَنَامُ خَمْسَ سَاعَاتٍ فَقَطْ.</a:t>
@@ -12754,6 +12859,7 @@
                   <a:srgbClr val="1B3B6F"/>
                 </a:solidFill>
                 <a:latin typeface="Amiri" pitchFamily="2" charset="-78"/>
+                <a:ea typeface="Amiri" pitchFamily="2" charset="-78"/>
                 <a:cs typeface="Amiri" pitchFamily="2" charset="-78"/>
               </a:rPr>
               <a:t>هَلْ تَنَامُ جَيِّدًا؟ وَكَمْ سَاعَةً تَدْرُسُ؟</a:t>
@@ -12857,6 +12963,7 @@
                   <a:srgbClr val="1B3B6F"/>
                 </a:solidFill>
                 <a:latin typeface="Amiri" pitchFamily="2" charset="-78"/>
+                <a:ea typeface="Amiri" pitchFamily="2" charset="-78"/>
                 <a:cs typeface="Amiri" pitchFamily="2" charset="-78"/>
               </a:rPr>
               <a:t>وَمَاذَا يَجِبُ أَنْ أَفْعَلَ أَيْضًا؟ هَلْ أَحْتَاجُ إِلَى دَوَاءٍ؟</a:t>
@@ -12933,6 +13040,7 @@
                   <a:srgbClr val="1B3B6F"/>
                 </a:solidFill>
                 <a:latin typeface="Amiri" pitchFamily="2" charset="-78"/>
+                <a:ea typeface="Amiri" pitchFamily="2" charset="-78"/>
                 <a:cs typeface="Amiri" pitchFamily="2" charset="-78"/>
               </a:rPr>
               <a:t>أَنْصَحُكَ بِأَنْ تَنَامَ ثَمَانِيَ سَاعَاتٍ.</a:t>
@@ -13036,6 +13144,7 @@
                   <a:srgbClr val="1B3B6F"/>
                 </a:solidFill>
                 <a:latin typeface="Amiri" pitchFamily="2" charset="-78"/>
+                <a:ea typeface="Amiri" pitchFamily="2" charset="-78"/>
                 <a:cs typeface="Amiri" pitchFamily="2" charset="-78"/>
               </a:rPr>
               <a:t>حَسَنًا، سَأَشْرَبُ المَاءَ كَثِيرًا، وَسَآخُذُ الحُبُوبَ عِنْدَ الصُّدَاعِ فَقَطْ.</a:t>
@@ -13112,6 +13221,7 @@
                   <a:srgbClr val="1B3B6F"/>
                 </a:solidFill>
                 <a:latin typeface="Amiri" pitchFamily="2" charset="-78"/>
+                <a:ea typeface="Amiri" pitchFamily="2" charset="-78"/>
                 <a:cs typeface="Amiri" pitchFamily="2" charset="-78"/>
               </a:rPr>
               <a:t>اشْرَبِ المَاءَ، وَخُذْ هٰذِهِ الحُبُوبَ عِنْدَ الصُّدَاعِ فَقَطْ.</a:t>
@@ -13215,6 +13325,7 @@
                   <a:srgbClr val="1B3B6F"/>
                 </a:solidFill>
                 <a:latin typeface="Amiri" pitchFamily="2" charset="-78"/>
+                <a:ea typeface="Amiri" pitchFamily="2" charset="-78"/>
                 <a:cs typeface="Amiri" pitchFamily="2" charset="-78"/>
               </a:rPr>
               <a:t>كُنْتُ أَلْعَبُ التِّنِسَ، لٰكِنِّي تَوَقَّفْتُ بِسَبَبِ الدِّرَاسَةِ.</a:t>
@@ -13291,6 +13402,7 @@
                   <a:srgbClr val="1B3B6F"/>
                 </a:solidFill>
                 <a:latin typeface="Amiri" pitchFamily="2" charset="-78"/>
+                <a:ea typeface="Amiri" pitchFamily="2" charset="-78"/>
                 <a:cs typeface="Amiri" pitchFamily="2" charset="-78"/>
               </a:rPr>
               <a:t>هَلْ تُمَارِسُ أَيَّ رِيَاضَةٍ هٰذِهِ الأَيَّامَ؟</a:t>
@@ -13500,6 +13612,7 @@
                   <a:srgbClr val="D4AF37"/>
                 </a:solidFill>
                 <a:latin typeface="Amiri" pitchFamily="2" charset="-78"/>
+                <a:ea typeface="Amiri" pitchFamily="2" charset="-78"/>
                 <a:cs typeface="Amiri" pitchFamily="2" charset="-78"/>
               </a:rPr>
               <a:t>م</a:t>
@@ -13820,6 +13933,7 @@
                   <a:srgbClr val="8A6D1E"/>
                 </a:solidFill>
                 <a:latin typeface="Amiri" pitchFamily="2" charset="-78"/>
+                <a:ea typeface="Amiri" pitchFamily="2" charset="-78"/>
                 <a:cs typeface="Amiri" pitchFamily="2" charset="-78"/>
               </a:rPr>
               <a:t>نَمُوذَجُ الإِجَابَةِ</a:t>
@@ -14062,6 +14176,7 @@
                   <a:srgbClr val="1B3B6F"/>
                 </a:solidFill>
                 <a:latin typeface="Amiri" pitchFamily="2" charset="-78"/>
+                <a:ea typeface="Amiri" pitchFamily="2" charset="-78"/>
                 <a:cs typeface="Amiri" pitchFamily="2" charset="-78"/>
               </a:rPr>
               <a:t>أَشْعُرُ بِالتَّعَبِ طُولَ الوَقْتِ، مِمَّا يُؤَثِّرُ فِي دِرَاسَتِي وَمِزَاجِي.</a:t>
@@ -14138,6 +14253,7 @@
                   <a:srgbClr val="1B3B6F"/>
                 </a:solidFill>
                 <a:latin typeface="Amiri" pitchFamily="2" charset="-78"/>
+                <a:ea typeface="Amiri" pitchFamily="2" charset="-78"/>
                 <a:cs typeface="Amiri" pitchFamily="2" charset="-78"/>
               </a:rPr>
               <a:t>أَهْلًا بِكَ فِي البَرْنَامَجِ. مَا سُؤَالُكَ؟</a:t>
@@ -14241,6 +14357,7 @@
                   <a:srgbClr val="1B3B6F"/>
                 </a:solidFill>
                 <a:latin typeface="Amiri" pitchFamily="2" charset="-78"/>
+                <a:ea typeface="Amiri" pitchFamily="2" charset="-78"/>
                 <a:cs typeface="Amiri" pitchFamily="2" charset="-78"/>
               </a:rPr>
               <a:t>جَرَّبْتُ أَنْ أَشْرَبَ القَهْوَةَ، لٰكِنَّهَا جَعَلَتْنِي أَسْهَرُ أَكْثَرَ.</a:t>
@@ -14317,6 +14434,7 @@
                   <a:srgbClr val="1B3B6F"/>
                 </a:solidFill>
                 <a:latin typeface="Amiri" pitchFamily="2" charset="-78"/>
+                <a:ea typeface="Amiri" pitchFamily="2" charset="-78"/>
                 <a:cs typeface="Amiri" pitchFamily="2" charset="-78"/>
               </a:rPr>
               <a:t>مَاذَا جَرَّبْتَ حَتَّى الآنَ؟</a:t>
@@ -14420,6 +14538,7 @@
                   <a:srgbClr val="1B3B6F"/>
                 </a:solidFill>
                 <a:latin typeface="Amiri" pitchFamily="2" charset="-78"/>
+                <a:ea typeface="Amiri" pitchFamily="2" charset="-78"/>
                 <a:cs typeface="Amiri" pitchFamily="2" charset="-78"/>
               </a:rPr>
               <a:t>لَا، لِأَنِّي أَعْتَقِدُ أَنَّ أَخْذَ الدَّوَاءِ بِدُونِ اسْتِشَارَةِ الطَّبِيبِ خَطِيرٌ.</a:t>
@@ -14496,6 +14615,7 @@
                   <a:srgbClr val="1B3B6F"/>
                 </a:solidFill>
                 <a:latin typeface="Amiri" pitchFamily="2" charset="-78"/>
+                <a:ea typeface="Amiri" pitchFamily="2" charset="-78"/>
                 <a:cs typeface="Amiri" pitchFamily="2" charset="-78"/>
               </a:rPr>
               <a:t>هَلْ تَأْخُذُ فِيتَامِينَاتٍ بِدُونِ اسْتِشَارَةٍ؟</a:t>
@@ -14599,6 +14719,7 @@
                   <a:srgbClr val="1B3B6F"/>
                 </a:solidFill>
                 <a:latin typeface="Amiri" pitchFamily="2" charset="-78"/>
+                <a:ea typeface="Amiri" pitchFamily="2" charset="-78"/>
                 <a:cs typeface="Amiri" pitchFamily="2" charset="-78"/>
               </a:rPr>
               <a:t>صَحِيحٌ أَنَّ النَّوْمَ مُهِمٌّ، غَيْرَ أَنَّ الوَاجِبَاتِ كَثِيرَةٌ، فَكَيْفَ أُنَظِّمُ وَقْتِي؟</a:t>
@@ -14675,6 +14796,7 @@
                   <a:srgbClr val="1B3B6F"/>
                 </a:solidFill>
                 <a:latin typeface="Amiri" pitchFamily="2" charset="-78"/>
+                <a:ea typeface="Amiri" pitchFamily="2" charset="-78"/>
                 <a:cs typeface="Amiri" pitchFamily="2" charset="-78"/>
               </a:rPr>
               <a:t>أَنْصَحُكَ بِأَنْ تُنَظِّمَ نَوْمَكَ وَتَتْرُكَ القَهْوَةَ.</a:t>
@@ -14778,6 +14900,7 @@
                   <a:srgbClr val="1B3B6F"/>
                 </a:solidFill>
                 <a:latin typeface="Amiri" pitchFamily="2" charset="-78"/>
+                <a:ea typeface="Amiri" pitchFamily="2" charset="-78"/>
                 <a:cs typeface="Amiri" pitchFamily="2" charset="-78"/>
               </a:rPr>
               <a:t>لَوْ كُنْتُ وَزِيرَ الصِّحَّةِ، لَفَتَحْتُ عِيَادَةً مَجَّانِيَّةً لِلشَّبَابِ فِي كُلِّ مَدْرَسَةٍ.</a:t>
@@ -14854,6 +14977,7 @@
                   <a:srgbClr val="1B3B6F"/>
                 </a:solidFill>
                 <a:latin typeface="Amiri" pitchFamily="2" charset="-78"/>
+                <a:ea typeface="Amiri" pitchFamily="2" charset="-78"/>
                 <a:cs typeface="Amiri" pitchFamily="2" charset="-78"/>
               </a:rPr>
               <a:t>لَوْ كُنْتَ وَزِيرَ الصِّحَّةِ، مَاذَا تَفْعَلُ لِلشَّبَابِ؟</a:t>
@@ -15063,6 +15187,7 @@
                   <a:srgbClr val="D4AF37"/>
                 </a:solidFill>
                 <a:latin typeface="Amiri" pitchFamily="2" charset="-78"/>
+                <a:ea typeface="Amiri" pitchFamily="2" charset="-78"/>
                 <a:cs typeface="Amiri" pitchFamily="2" charset="-78"/>
               </a:rPr>
               <a:t>م</a:t>
@@ -15383,6 +15508,7 @@
                   <a:srgbClr val="8A6D1E"/>
                 </a:solidFill>
                 <a:latin typeface="Amiri" pitchFamily="2" charset="-78"/>
+                <a:ea typeface="Amiri" pitchFamily="2" charset="-78"/>
                 <a:cs typeface="Amiri" pitchFamily="2" charset="-78"/>
               </a:rPr>
               <a:t>الطَّبِيبُ وَالدَّوَاءُ</a:t>
@@ -15663,6 +15789,7 @@
                   <a:srgbClr val="1B3B6F"/>
                 </a:solidFill>
                 <a:latin typeface="Amiri" pitchFamily="2" charset="-78"/>
+                <a:ea typeface="Amiri" pitchFamily="2" charset="-78"/>
                 <a:cs typeface="Amiri" pitchFamily="2" charset="-78"/>
               </a:rPr>
               <a:t>ذَهَبْتُ إِلَى الطَّبِيبِ فِي …</a:t>
@@ -15739,6 +15866,7 @@
                   <a:srgbClr val="1B3B6F"/>
                 </a:solidFill>
                 <a:latin typeface="Amiri" pitchFamily="2" charset="-78"/>
+                <a:ea typeface="Amiri" pitchFamily="2" charset="-78"/>
                 <a:cs typeface="Amiri" pitchFamily="2" charset="-78"/>
               </a:rPr>
               <a:t>مَتَى ذَهَبْتَ إِلَى الطَّبِيبِ آخِرَ مَرَّةٍ؟</a:t>
@@ -15907,6 +16035,7 @@
                   <a:srgbClr val="1B3B6F"/>
                 </a:solidFill>
                 <a:latin typeface="Amiri" pitchFamily="2" charset="-78"/>
+                <a:ea typeface="Amiri" pitchFamily="2" charset="-78"/>
                 <a:cs typeface="Amiri" pitchFamily="2" charset="-78"/>
               </a:rPr>
               <a:t>الصَّيْدَلِيَّةُ … بِجَانِبِ …</a:t>
@@ -15983,6 +16112,7 @@
                   <a:srgbClr val="1B3B6F"/>
                 </a:solidFill>
                 <a:latin typeface="Amiri" pitchFamily="2" charset="-78"/>
+                <a:ea typeface="Amiri" pitchFamily="2" charset="-78"/>
                 <a:cs typeface="Amiri" pitchFamily="2" charset="-78"/>
               </a:rPr>
               <a:t>أَيْنَ الصَّيْدَلِيَّةُ القَرِيبَةُ مِنْ بَيْتِكَ؟</a:t>
@@ -16151,6 +16281,7 @@
                   <a:srgbClr val="1B3B6F"/>
                 </a:solidFill>
                 <a:latin typeface="Amiri" pitchFamily="2" charset="-78"/>
+                <a:ea typeface="Amiri" pitchFamily="2" charset="-78"/>
                 <a:cs typeface="Amiri" pitchFamily="2" charset="-78"/>
               </a:rPr>
               <a:t>لَا، لَا أُحِبُّ … لِأَنَّ …</a:t>
@@ -16227,6 +16358,7 @@
                   <a:srgbClr val="1B3B6F"/>
                 </a:solidFill>
                 <a:latin typeface="Amiri" pitchFamily="2" charset="-78"/>
+                <a:ea typeface="Amiri" pitchFamily="2" charset="-78"/>
                 <a:cs typeface="Amiri" pitchFamily="2" charset="-78"/>
               </a:rPr>
               <a:t>هَلْ تُحِبُّ أَنْ تَأْخُذَ الدَّوَاءَ؟</a:t>
@@ -16395,6 +16527,7 @@
                   <a:srgbClr val="1B3B6F"/>
                 </a:solidFill>
                 <a:latin typeface="Amiri" pitchFamily="2" charset="-78"/>
+                <a:ea typeface="Amiri" pitchFamily="2" charset="-78"/>
                 <a:cs typeface="Amiri" pitchFamily="2" charset="-78"/>
               </a:rPr>
               <a:t>أَشْرَبُ … وَأَرْتَاحُ …</a:t>
@@ -16471,6 +16604,7 @@
                   <a:srgbClr val="1B3B6F"/>
                 </a:solidFill>
                 <a:latin typeface="Amiri" pitchFamily="2" charset="-78"/>
+                <a:ea typeface="Amiri" pitchFamily="2" charset="-78"/>
                 <a:cs typeface="Amiri" pitchFamily="2" charset="-78"/>
               </a:rPr>
               <a:t>مَاذَا تَفْعَلُ عِنْدَمَا عِنْدَكَ زُكَامٌ؟</a:t>
@@ -16639,6 +16773,7 @@
                   <a:srgbClr val="1B3B6F"/>
                 </a:solidFill>
                 <a:latin typeface="Amiri" pitchFamily="2" charset="-78"/>
+                <a:ea typeface="Amiri" pitchFamily="2" charset="-78"/>
                 <a:cs typeface="Amiri" pitchFamily="2" charset="-78"/>
               </a:rPr>
               <a:t>نَعَمْ / لَا، … لِأَنَّ …</a:t>
@@ -16715,6 +16850,7 @@
                   <a:srgbClr val="1B3B6F"/>
                 </a:solidFill>
                 <a:latin typeface="Amiri" pitchFamily="2" charset="-78"/>
+                <a:ea typeface="Amiri" pitchFamily="2" charset="-78"/>
                 <a:cs typeface="Amiri" pitchFamily="2" charset="-78"/>
               </a:rPr>
               <a:t>هَلْ تُرِيدُ أَنْ تَكُونَ طَبِيبًا؟</a:t>
@@ -16869,6 +17005,7 @@
                   <a:srgbClr val="1B3B6F"/>
                 </a:solidFill>
                 <a:latin typeface="Amiri" pitchFamily="2" charset="-78"/>
+                <a:ea typeface="Amiri" pitchFamily="2" charset="-78"/>
                 <a:cs typeface="Amiri" pitchFamily="2" charset="-78"/>
               </a:rPr>
               <a:t>عَفْوًا، هَلْ يُمْكِنُ أَنْ تُعِيدَ السُّؤَالَ؟</a:t>
@@ -17002,6 +17139,7 @@
                   <a:srgbClr val="D4AF37"/>
                 </a:solidFill>
                 <a:latin typeface="Amiri" pitchFamily="2" charset="-78"/>
+                <a:ea typeface="Amiri" pitchFamily="2" charset="-78"/>
                 <a:cs typeface="Amiri" pitchFamily="2" charset="-78"/>
               </a:rPr>
               <a:t>م</a:t>
@@ -17322,6 +17460,7 @@
                   <a:srgbClr val="8A6D1E"/>
                 </a:solidFill>
                 <a:latin typeface="Amiri" pitchFamily="2" charset="-78"/>
+                <a:ea typeface="Amiri" pitchFamily="2" charset="-78"/>
                 <a:cs typeface="Amiri" pitchFamily="2" charset="-78"/>
               </a:rPr>
               <a:t>نَصَائِحُ صِحِّيَّةٌ</a:t>
@@ -17602,6 +17741,7 @@
                   <a:srgbClr val="1B3B6F"/>
                 </a:solidFill>
                 <a:latin typeface="Amiri" pitchFamily="2" charset="-78"/>
+                <a:ea typeface="Amiri" pitchFamily="2" charset="-78"/>
                 <a:cs typeface="Amiri" pitchFamily="2" charset="-78"/>
               </a:rPr>
               <a:t>ذَهَبْتُ لِأَنَّ … فَفَحَصَنِي … وَنَصَحَنِي بِأَنْ …</a:t>
@@ -17678,6 +17818,7 @@
                   <a:srgbClr val="1B3B6F"/>
                 </a:solidFill>
                 <a:latin typeface="Amiri" pitchFamily="2" charset="-78"/>
+                <a:ea typeface="Amiri" pitchFamily="2" charset="-78"/>
                 <a:cs typeface="Amiri" pitchFamily="2" charset="-78"/>
               </a:rPr>
               <a:t>صِفْ زِيَارَتَكَ الأَخِيرَةَ لِلطَّبِيبِ.</a:t>
@@ -17781,6 +17922,7 @@
                   <a:srgbClr val="1B3B6F"/>
                 </a:solidFill>
                 <a:latin typeface="Amiri" pitchFamily="2" charset="-78"/>
+                <a:ea typeface="Amiri" pitchFamily="2" charset="-78"/>
                 <a:cs typeface="Amiri" pitchFamily="2" charset="-78"/>
               </a:rPr>
               <a:t>أَنْصَحُهُ بِأَنْ … وَأَلَّا …</a:t>
@@ -17857,6 +17999,7 @@
                   <a:srgbClr val="1B3B6F"/>
                 </a:solidFill>
                 <a:latin typeface="Amiri" pitchFamily="2" charset="-78"/>
+                <a:ea typeface="Amiri" pitchFamily="2" charset="-78"/>
                 <a:cs typeface="Amiri" pitchFamily="2" charset="-78"/>
               </a:rPr>
               <a:t>بِمَاذَا تَنْصَحُ صَدِيقًا عِنْدَهُ زُكَامٌ؟</a:t>
@@ -17960,6 +18103,7 @@
                   <a:srgbClr val="1B3B6F"/>
                 </a:solidFill>
                 <a:latin typeface="Amiri" pitchFamily="2" charset="-78"/>
+                <a:ea typeface="Amiri" pitchFamily="2" charset="-78"/>
                 <a:cs typeface="Amiri" pitchFamily="2" charset="-78"/>
               </a:rPr>
               <a:t>نَعَمْ، أَقْرَؤُهَا لِأَنَّ …</a:t>
@@ -18036,6 +18180,7 @@
                   <a:srgbClr val="1B3B6F"/>
                 </a:solidFill>
                 <a:latin typeface="Amiri" pitchFamily="2" charset="-78"/>
+                <a:ea typeface="Amiri" pitchFamily="2" charset="-78"/>
                 <a:cs typeface="Amiri" pitchFamily="2" charset="-78"/>
               </a:rPr>
               <a:t>هَلْ تَقْرَأُ تَعْلِيمَاتِ الدَّوَاءِ؟ لِمَاذَا؟</a:t>
@@ -18139,6 +18284,7 @@
                   <a:srgbClr val="1B3B6F"/>
                 </a:solidFill>
                 <a:latin typeface="Amiri" pitchFamily="2" charset="-78"/>
+                <a:ea typeface="Amiri" pitchFamily="2" charset="-78"/>
                 <a:cs typeface="Amiri" pitchFamily="2" charset="-78"/>
               </a:rPr>
               <a:t>أَعْتَقِدُ أَنَّ العَسَلَ مُفِيدٌ … لٰكِنْ …</a:t>
@@ -18215,6 +18361,7 @@
                   <a:srgbClr val="1B3B6F"/>
                 </a:solidFill>
                 <a:latin typeface="Amiri" pitchFamily="2" charset="-78"/>
+                <a:ea typeface="Amiri" pitchFamily="2" charset="-78"/>
                 <a:cs typeface="Amiri" pitchFamily="2" charset="-78"/>
               </a:rPr>
               <a:t>مَا رَأْيُكَ فِي الطِّبِّ الشَّعْبِيِّ، مِثْلِ العَسَلِ وَالأَعْشَابِ؟</a:t>
@@ -18318,6 +18465,7 @@
                   <a:srgbClr val="1B3B6F"/>
                 </a:solidFill>
                 <a:latin typeface="Amiri" pitchFamily="2" charset="-78"/>
+                <a:ea typeface="Amiri" pitchFamily="2" charset="-78"/>
                 <a:cs typeface="Amiri" pitchFamily="2" charset="-78"/>
               </a:rPr>
               <a:t>خَالَتِي / عَمِّي … تَعْمَلُ / يَعْمَلُ …</a:t>
@@ -18394,6 +18542,7 @@
                   <a:srgbClr val="1B3B6F"/>
                 </a:solidFill>
                 <a:latin typeface="Amiri" pitchFamily="2" charset="-78"/>
+                <a:ea typeface="Amiri" pitchFamily="2" charset="-78"/>
                 <a:cs typeface="Amiri" pitchFamily="2" charset="-78"/>
               </a:rPr>
               <a:t>مَنْ فِي أُسْرَتِكَ يَعْمَلُ فِي مَجَالِ الصِّحَّةِ؟</a:t>
@@ -18603,6 +18752,7 @@
                   <a:srgbClr val="D4AF37"/>
                 </a:solidFill>
                 <a:latin typeface="Amiri" pitchFamily="2" charset="-78"/>
+                <a:ea typeface="Amiri" pitchFamily="2" charset="-78"/>
                 <a:cs typeface="Amiri" pitchFamily="2" charset="-78"/>
               </a:rPr>
               <a:t>م</a:t>
@@ -18923,6 +19073,7 @@
                   <a:srgbClr val="8A6D1E"/>
                 </a:solidFill>
                 <a:latin typeface="Amiri" pitchFamily="2" charset="-78"/>
+                <a:ea typeface="Amiri" pitchFamily="2" charset="-78"/>
                 <a:cs typeface="Amiri" pitchFamily="2" charset="-78"/>
               </a:rPr>
               <a:t>الدَّوَاءُ وَالمُجْتَمَعُ</a:t>
@@ -19203,6 +19354,7 @@
                   <a:srgbClr val="1B3B6F"/>
                 </a:solidFill>
                 <a:latin typeface="Amiri" pitchFamily="2" charset="-78"/>
+                <a:ea typeface="Amiri" pitchFamily="2" charset="-78"/>
                 <a:cs typeface="Amiri" pitchFamily="2" charset="-78"/>
               </a:rPr>
               <a:t>نَعَمْ، فِي رَأْيِي … لِأَنَّهُمْ …</a:t>
@@ -19279,6 +19431,7 @@
                   <a:srgbClr val="1B3B6F"/>
                 </a:solidFill>
                 <a:latin typeface="Amiri" pitchFamily="2" charset="-78"/>
+                <a:ea typeface="Amiri" pitchFamily="2" charset="-78"/>
                 <a:cs typeface="Amiri" pitchFamily="2" charset="-78"/>
               </a:rPr>
               <a:t>هَلْ يَأْخُذُ النَّاسُ أَدْوِيَةً أَكْثَرَ مِنَ اللَّازِمِ؟</a:t>
@@ -19382,6 +19535,7 @@
                   <a:srgbClr val="1B3B6F"/>
                 </a:solidFill>
                 <a:latin typeface="Amiri" pitchFamily="2" charset="-78"/>
+                <a:ea typeface="Amiri" pitchFamily="2" charset="-78"/>
                 <a:cs typeface="Amiri" pitchFamily="2" charset="-78"/>
               </a:rPr>
               <a:t>الطَّبِيبُ … أَمَّا الصَّيْدَلِيُّ فَيَشْرَحُ …</a:t>
@@ -19458,6 +19612,7 @@
                   <a:srgbClr val="1B3B6F"/>
                 </a:solidFill>
                 <a:latin typeface="Amiri" pitchFamily="2" charset="-78"/>
+                <a:ea typeface="Amiri" pitchFamily="2" charset="-78"/>
                 <a:cs typeface="Amiri" pitchFamily="2" charset="-78"/>
               </a:rPr>
               <a:t>مَا الفَرْقُ بَيْنَ الطَّبِيبِ وَالصَّيْدَلِيِّ فِي رَأْيِكَ؟</a:t>
@@ -19561,6 +19716,7 @@
                   <a:srgbClr val="1B3B6F"/>
                 </a:solidFill>
                 <a:latin typeface="Amiri" pitchFamily="2" charset="-78"/>
+                <a:ea typeface="Amiri" pitchFamily="2" charset="-78"/>
                 <a:cs typeface="Amiri" pitchFamily="2" charset="-78"/>
               </a:rPr>
               <a:t>صَحِيحٌ أَنَّهَا … غَيْرَ أَنَّ …</a:t>
@@ -19637,6 +19793,7 @@
                   <a:srgbClr val="1B3B6F"/>
                 </a:solidFill>
                 <a:latin typeface="Amiri" pitchFamily="2" charset="-78"/>
+                <a:ea typeface="Amiri" pitchFamily="2" charset="-78"/>
                 <a:cs typeface="Amiri" pitchFamily="2" charset="-78"/>
               </a:rPr>
               <a:t>هَلِ الاسْتِشَارَةُ الطِّبِّيَّةُ عَبْرَ الإِنْتَرْنِتِ فِكْرَةٌ جَيِّدَةٌ؟</a:t>
@@ -19740,6 +19897,7 @@
                   <a:srgbClr val="1B3B6F"/>
                 </a:solidFill>
                 <a:latin typeface="Amiri" pitchFamily="2" charset="-78"/>
+                <a:ea typeface="Amiri" pitchFamily="2" charset="-78"/>
                 <a:cs typeface="Amiri" pitchFamily="2" charset="-78"/>
               </a:rPr>
               <a:t>فِي أَيَّامِ جَدِّي كَانَ … أَمَّا اليَوْمَ فَهُنَاكَ …</a:t>
@@ -19816,6 +19974,7 @@
                   <a:srgbClr val="1B3B6F"/>
                 </a:solidFill>
                 <a:latin typeface="Amiri" pitchFamily="2" charset="-78"/>
+                <a:ea typeface="Amiri" pitchFamily="2" charset="-78"/>
                 <a:cs typeface="Amiri" pitchFamily="2" charset="-78"/>
               </a:rPr>
               <a:t>كَيْفَ تَغَيَّرَتْ خِدْمَاتُ الصِّحَّةِ مُنْذُ أَيَّامِ أَجْدَادِكَ؟</a:t>
@@ -19919,6 +20078,7 @@
                   <a:srgbClr val="1B3B6F"/>
                 </a:solidFill>
                 <a:latin typeface="Amiri" pitchFamily="2" charset="-78"/>
+                <a:ea typeface="Amiri" pitchFamily="2" charset="-78"/>
                 <a:cs typeface="Amiri" pitchFamily="2" charset="-78"/>
               </a:rPr>
               <a:t>لَوْ أَصْبَحْتُ طَبِيبًا، لَعَمِلْتُ فِي …</a:t>
@@ -19995,6 +20155,7 @@
                   <a:srgbClr val="1B3B6F"/>
                 </a:solidFill>
                 <a:latin typeface="Amiri" pitchFamily="2" charset="-78"/>
+                <a:ea typeface="Amiri" pitchFamily="2" charset="-78"/>
                 <a:cs typeface="Amiri" pitchFamily="2" charset="-78"/>
               </a:rPr>
               <a:t>لَوْ أَصْبَحْتَ طَبِيبًا، أَيْنَ تُحِبُّ أَنْ تَعْمَلَ؟</a:t>
@@ -20204,6 +20365,7 @@
                   <a:srgbClr val="D4AF37"/>
                 </a:solidFill>
                 <a:latin typeface="Amiri" pitchFamily="2" charset="-78"/>
+                <a:ea typeface="Amiri" pitchFamily="2" charset="-78"/>
                 <a:cs typeface="Amiri" pitchFamily="2" charset="-78"/>
               </a:rPr>
               <a:t>م</a:t>
@@ -20524,6 +20686,7 @@
                   <a:srgbClr val="8A6D1E"/>
                 </a:solidFill>
                 <a:latin typeface="Amiri" pitchFamily="2" charset="-78"/>
+                <a:ea typeface="Amiri" pitchFamily="2" charset="-78"/>
                 <a:cs typeface="Amiri" pitchFamily="2" charset="-78"/>
               </a:rPr>
               <a:t>آدَابُ الصَّفِّ</a:t>
@@ -22055,6 +22218,7 @@
                   <a:srgbClr val="D4AF37"/>
                 </a:solidFill>
                 <a:latin typeface="Amiri" pitchFamily="2" charset="-78"/>
+                <a:ea typeface="Amiri" pitchFamily="2" charset="-78"/>
                 <a:cs typeface="Amiri" pitchFamily="2" charset="-78"/>
               </a:rPr>
               <a:t>م</a:t>
@@ -22375,6 +22539,7 @@
                   <a:srgbClr val="8A6D1E"/>
                 </a:solidFill>
                 <a:latin typeface="Amiri" pitchFamily="2" charset="-78"/>
+                <a:ea typeface="Amiri" pitchFamily="2" charset="-78"/>
                 <a:cs typeface="Amiri" pitchFamily="2" charset="-78"/>
               </a:rPr>
               <a:t>نَمُوذَجُ الإِجَابَةِ</a:t>
@@ -22617,6 +22782,7 @@
                   <a:srgbClr val="1B3B6F"/>
                 </a:solidFill>
                 <a:latin typeface="Amiri" pitchFamily="2" charset="-78"/>
+                <a:ea typeface="Amiri" pitchFamily="2" charset="-78"/>
                 <a:cs typeface="Amiri" pitchFamily="2" charset="-78"/>
               </a:rPr>
               <a:t>ذَهَبْتُ إِلَى الطَّبِيبِ فِي الشَّهْرِ المَاضِي.</a:t>
@@ -22693,6 +22859,7 @@
                   <a:srgbClr val="1B3B6F"/>
                 </a:solidFill>
                 <a:latin typeface="Amiri" pitchFamily="2" charset="-78"/>
+                <a:ea typeface="Amiri" pitchFamily="2" charset="-78"/>
                 <a:cs typeface="Amiri" pitchFamily="2" charset="-78"/>
               </a:rPr>
               <a:t>مَتَى ذَهَبْتَ إِلَى الطَّبِيبِ آخِرَ مَرَّةٍ؟</a:t>
@@ -22796,6 +22963,7 @@
                   <a:srgbClr val="1B3B6F"/>
                 </a:solidFill>
                 <a:latin typeface="Amiri" pitchFamily="2" charset="-78"/>
+                <a:ea typeface="Amiri" pitchFamily="2" charset="-78"/>
                 <a:cs typeface="Amiri" pitchFamily="2" charset="-78"/>
               </a:rPr>
               <a:t>الصَّيْدَلِيَّةُ فِي شَارِعِنَا، بِجَانِبِ المَخْبَزِ.</a:t>
@@ -22872,6 +23040,7 @@
                   <a:srgbClr val="1B3B6F"/>
                 </a:solidFill>
                 <a:latin typeface="Amiri" pitchFamily="2" charset="-78"/>
+                <a:ea typeface="Amiri" pitchFamily="2" charset="-78"/>
                 <a:cs typeface="Amiri" pitchFamily="2" charset="-78"/>
               </a:rPr>
               <a:t>أَيْنَ الصَّيْدَلِيَّةُ القَرِيبَةُ مِنْ بَيْتِكَ؟</a:t>
@@ -22975,6 +23144,7 @@
                   <a:srgbClr val="1B3B6F"/>
                 </a:solidFill>
                 <a:latin typeface="Amiri" pitchFamily="2" charset="-78"/>
+                <a:ea typeface="Amiri" pitchFamily="2" charset="-78"/>
                 <a:cs typeface="Amiri" pitchFamily="2" charset="-78"/>
               </a:rPr>
               <a:t>لَا، لَا أُحِبُّ الدَّوَاءَ، لِأَنَّ طَعْمَهُ مُرٌّ.</a:t>
@@ -23051,6 +23221,7 @@
                   <a:srgbClr val="1B3B6F"/>
                 </a:solidFill>
                 <a:latin typeface="Amiri" pitchFamily="2" charset="-78"/>
+                <a:ea typeface="Amiri" pitchFamily="2" charset="-78"/>
                 <a:cs typeface="Amiri" pitchFamily="2" charset="-78"/>
               </a:rPr>
               <a:t>هَلْ تُحِبُّ أَنْ تَأْخُذَ الدَّوَاءَ؟</a:t>
@@ -23154,6 +23325,7 @@
                   <a:srgbClr val="1B3B6F"/>
                 </a:solidFill>
                 <a:latin typeface="Amiri" pitchFamily="2" charset="-78"/>
+                <a:ea typeface="Amiri" pitchFamily="2" charset="-78"/>
                 <a:cs typeface="Amiri" pitchFamily="2" charset="-78"/>
               </a:rPr>
               <a:t>أَشْرَبُ الشَّايَ بِاللَّيْمُونِ، وَأَرْتَاحُ فِي البَيْتِ.</a:t>
@@ -23230,6 +23402,7 @@
                   <a:srgbClr val="1B3B6F"/>
                 </a:solidFill>
                 <a:latin typeface="Amiri" pitchFamily="2" charset="-78"/>
+                <a:ea typeface="Amiri" pitchFamily="2" charset="-78"/>
                 <a:cs typeface="Amiri" pitchFamily="2" charset="-78"/>
               </a:rPr>
               <a:t>مَاذَا تَفْعَلُ عِنْدَمَا عِنْدَكَ زُكَامٌ؟</a:t>
@@ -23333,6 +23506,7 @@
                   <a:srgbClr val="1B3B6F"/>
                 </a:solidFill>
                 <a:latin typeface="Amiri" pitchFamily="2" charset="-78"/>
+                <a:ea typeface="Amiri" pitchFamily="2" charset="-78"/>
                 <a:cs typeface="Amiri" pitchFamily="2" charset="-78"/>
               </a:rPr>
               <a:t>نَعَمْ، أُرِيدُ أَنْ أَكُونَ طَبِيبًا، لِأَنِّي أُحِبُّ أَنْ أُسَاعِدَ النَّاسَ.</a:t>
@@ -23409,6 +23583,7 @@
                   <a:srgbClr val="1B3B6F"/>
                 </a:solidFill>
                 <a:latin typeface="Amiri" pitchFamily="2" charset="-78"/>
+                <a:ea typeface="Amiri" pitchFamily="2" charset="-78"/>
                 <a:cs typeface="Amiri" pitchFamily="2" charset="-78"/>
               </a:rPr>
               <a:t>هَلْ تُرِيدُ أَنْ تَكُونَ طَبِيبًا؟</a:t>
@@ -23618,6 +23793,7 @@
                   <a:srgbClr val="D4AF37"/>
                 </a:solidFill>
                 <a:latin typeface="Amiri" pitchFamily="2" charset="-78"/>
+                <a:ea typeface="Amiri" pitchFamily="2" charset="-78"/>
                 <a:cs typeface="Amiri" pitchFamily="2" charset="-78"/>
               </a:rPr>
               <a:t>م</a:t>
@@ -23938,6 +24114,7 @@
                   <a:srgbClr val="8A6D1E"/>
                 </a:solidFill>
                 <a:latin typeface="Amiri" pitchFamily="2" charset="-78"/>
+                <a:ea typeface="Amiri" pitchFamily="2" charset="-78"/>
                 <a:cs typeface="Amiri" pitchFamily="2" charset="-78"/>
               </a:rPr>
               <a:t>نَمُوذَجُ الإِجَابَةِ</a:t>
@@ -24180,6 +24357,7 @@
                   <a:srgbClr val="1B3B6F"/>
                 </a:solidFill>
                 <a:latin typeface="Amiri" pitchFamily="2" charset="-78"/>
+                <a:ea typeface="Amiri" pitchFamily="2" charset="-78"/>
                 <a:cs typeface="Amiri" pitchFamily="2" charset="-78"/>
               </a:rPr>
               <a:t>ذَهَبْتُ لِأَنَّ أُذُنِي كَانَتْ تُؤْلِمُنِي، فَفَحَصَنِي الطَّبِيبُ، وَنَصَحَنِي بِأَنْ أَسْتَعْمِلَ قَطْرَةً أُسْبُوعًا.</a:t>
@@ -24256,6 +24434,7 @@
                   <a:srgbClr val="1B3B6F"/>
                 </a:solidFill>
                 <a:latin typeface="Amiri" pitchFamily="2" charset="-78"/>
+                <a:ea typeface="Amiri" pitchFamily="2" charset="-78"/>
                 <a:cs typeface="Amiri" pitchFamily="2" charset="-78"/>
               </a:rPr>
               <a:t>صِفْ زِيَارَتَكَ الأَخِيرَةَ لِلطَّبِيبِ.</a:t>
@@ -24359,6 +24538,7 @@
                   <a:srgbClr val="1B3B6F"/>
                 </a:solidFill>
                 <a:latin typeface="Amiri" pitchFamily="2" charset="-78"/>
+                <a:ea typeface="Amiri" pitchFamily="2" charset="-78"/>
                 <a:cs typeface="Amiri" pitchFamily="2" charset="-78"/>
               </a:rPr>
               <a:t>أَنْصَحُهُ بِأَنْ يَرْتَاحَ وَيَشْرَبَ سَوَائِلَ دَافِئَةً، وَأَلَّا يَخْرُجَ فِي البَرْدِ.</a:t>
@@ -24435,6 +24615,7 @@
                   <a:srgbClr val="1B3B6F"/>
                 </a:solidFill>
                 <a:latin typeface="Amiri" pitchFamily="2" charset="-78"/>
+                <a:ea typeface="Amiri" pitchFamily="2" charset="-78"/>
                 <a:cs typeface="Amiri" pitchFamily="2" charset="-78"/>
               </a:rPr>
               <a:t>بِمَاذَا تَنْصَحُ صَدِيقًا عِنْدَهُ زُكَامٌ؟</a:t>
@@ -24538,6 +24719,7 @@
                   <a:srgbClr val="1B3B6F"/>
                 </a:solidFill>
                 <a:latin typeface="Amiri" pitchFamily="2" charset="-78"/>
+                <a:ea typeface="Amiri" pitchFamily="2" charset="-78"/>
                 <a:cs typeface="Amiri" pitchFamily="2" charset="-78"/>
               </a:rPr>
               <a:t>نَعَمْ، أَقْرَؤُهَا دَائِمًا، لِأَنَّ بَعْضَ الأَدْوِيَةِ يَجِبُ أَنْ نَأْخُذَهَا بَعْدَ الأَكْلِ.</a:t>
@@ -24614,6 +24796,7 @@
                   <a:srgbClr val="1B3B6F"/>
                 </a:solidFill>
                 <a:latin typeface="Amiri" pitchFamily="2" charset="-78"/>
+                <a:ea typeface="Amiri" pitchFamily="2" charset="-78"/>
                 <a:cs typeface="Amiri" pitchFamily="2" charset="-78"/>
               </a:rPr>
               <a:t>هَلْ تَقْرَأُ تَعْلِيمَاتِ الدَّوَاءِ؟ لِمَاذَا؟</a:t>
@@ -24717,6 +24900,7 @@
                   <a:srgbClr val="1B3B6F"/>
                 </a:solidFill>
                 <a:latin typeface="Amiri" pitchFamily="2" charset="-78"/>
+                <a:ea typeface="Amiri" pitchFamily="2" charset="-78"/>
                 <a:cs typeface="Amiri" pitchFamily="2" charset="-78"/>
               </a:rPr>
               <a:t>أَعْتَقِدُ أَنَّ العَسَلَ مُفِيدٌ لِلْحَلْقِ، لٰكِنْ يَجِبُ أَنْ نَذْهَبَ إِلَى الطَّبِيبِ إِذَا كَانَ المَرَضُ شَدِيدًا.</a:t>
@@ -24796,6 +24980,7 @@
                   <a:srgbClr val="1B3B6F"/>
                 </a:solidFill>
                 <a:latin typeface="Amiri" pitchFamily="2" charset="-78"/>
+                <a:ea typeface="Amiri" pitchFamily="2" charset="-78"/>
                 <a:cs typeface="Amiri" pitchFamily="2" charset="-78"/>
               </a:rPr>
               <a:t>مَا رَأْيُكَ فِي الطِّبِّ الشَّعْبِيِّ، مِثْلِ العَسَلِ وَالأَعْشَابِ؟</a:t>
@@ -24899,6 +25084,7 @@
                   <a:srgbClr val="1B3B6F"/>
                 </a:solidFill>
                 <a:latin typeface="Amiri" pitchFamily="2" charset="-78"/>
+                <a:ea typeface="Amiri" pitchFamily="2" charset="-78"/>
                 <a:cs typeface="Amiri" pitchFamily="2" charset="-78"/>
               </a:rPr>
               <a:t>خَالَتِي مُمَرِّضَةٌ، وَتَعْمَلُ فِي مُسْتَشْفًى كَبِيرٍ، وَهِيَ تَنْصَحُنَا دَائِمًا بِالنَّوْمِ المُبَكِّرِ.</a:t>
@@ -24975,6 +25161,7 @@
                   <a:srgbClr val="1B3B6F"/>
                 </a:solidFill>
                 <a:latin typeface="Amiri" pitchFamily="2" charset="-78"/>
+                <a:ea typeface="Amiri" pitchFamily="2" charset="-78"/>
                 <a:cs typeface="Amiri" pitchFamily="2" charset="-78"/>
               </a:rPr>
               <a:t>مَنْ فِي أُسْرَتِكَ يَعْمَلُ فِي مَجَالِ الصِّحَّةِ؟</a:t>
@@ -25184,6 +25371,7 @@
                   <a:srgbClr val="D4AF37"/>
                 </a:solidFill>
                 <a:latin typeface="Amiri" pitchFamily="2" charset="-78"/>
+                <a:ea typeface="Amiri" pitchFamily="2" charset="-78"/>
                 <a:cs typeface="Amiri" pitchFamily="2" charset="-78"/>
               </a:rPr>
               <a:t>م</a:t>
@@ -25504,6 +25692,7 @@
                   <a:srgbClr val="8A6D1E"/>
                 </a:solidFill>
                 <a:latin typeface="Amiri" pitchFamily="2" charset="-78"/>
+                <a:ea typeface="Amiri" pitchFamily="2" charset="-78"/>
                 <a:cs typeface="Amiri" pitchFamily="2" charset="-78"/>
               </a:rPr>
               <a:t>نَمُوذَجُ الإِجَابَةِ</a:t>
@@ -25746,6 +25935,7 @@
                   <a:srgbClr val="1B3B6F"/>
                 </a:solidFill>
                 <a:latin typeface="Amiri" pitchFamily="2" charset="-78"/>
+                <a:ea typeface="Amiri" pitchFamily="2" charset="-78"/>
                 <a:cs typeface="Amiri" pitchFamily="2" charset="-78"/>
               </a:rPr>
               <a:t>نَعَمْ، فِي رَأْيِي يَأْخُذُ كَثِيرٌ مِنَ النَّاسِ المُسَكِّنَاتِ عِنْدَ أَيِّ أَلَمٍ بَسِيطٍ، بَدَلًا مِنْ أَنْ يَرْتَاحُوا.</a:t>
@@ -25822,6 +26012,7 @@
                   <a:srgbClr val="1B3B6F"/>
                 </a:solidFill>
                 <a:latin typeface="Amiri" pitchFamily="2" charset="-78"/>
+                <a:ea typeface="Amiri" pitchFamily="2" charset="-78"/>
                 <a:cs typeface="Amiri" pitchFamily="2" charset="-78"/>
               </a:rPr>
               <a:t>هَلْ يَأْخُذُ النَّاسُ أَدْوِيَةً أَكْثَرَ مِنَ اللَّازِمِ؟</a:t>
@@ -25925,6 +26116,7 @@
                   <a:srgbClr val="1B3B6F"/>
                 </a:solidFill>
                 <a:latin typeface="Amiri" pitchFamily="2" charset="-78"/>
+                <a:ea typeface="Amiri" pitchFamily="2" charset="-78"/>
                 <a:cs typeface="Amiri" pitchFamily="2" charset="-78"/>
               </a:rPr>
               <a:t>الطَّبِيبُ يَفْحَصُ المَرِيضَ وَيَكْتُبُ الوَصْفَةَ، أَمَّا الصَّيْدَلِيُّ فَيَشْرَحُ كَيْفَ نَأْخُذُ الدَّوَاءَ.</a:t>
@@ -26001,6 +26193,7 @@
                   <a:srgbClr val="1B3B6F"/>
                 </a:solidFill>
                 <a:latin typeface="Amiri" pitchFamily="2" charset="-78"/>
+                <a:ea typeface="Amiri" pitchFamily="2" charset="-78"/>
                 <a:cs typeface="Amiri" pitchFamily="2" charset="-78"/>
               </a:rPr>
               <a:t>مَا الفَرْقُ بَيْنَ الطَّبِيبِ وَالصَّيْدَلِيِّ فِي رَأْيِكَ؟</a:t>
@@ -26104,6 +26297,7 @@
                   <a:srgbClr val="1B3B6F"/>
                 </a:solidFill>
                 <a:latin typeface="Amiri" pitchFamily="2" charset="-78"/>
+                <a:ea typeface="Amiri" pitchFamily="2" charset="-78"/>
                 <a:cs typeface="Amiri" pitchFamily="2" charset="-78"/>
               </a:rPr>
               <a:t>صَحِيحٌ أَنَّهَا سَرِيعَةٌ وَتُوَفِّرُ الوَقْتَ، غَيْرَ أَنَّ الطَّبِيبَ لَا يَسْتَطِيعُ أَنْ يَفْحَصَ المَرِيضَ بِنَفْسِهِ.</a:t>
@@ -26183,6 +26377,7 @@
                   <a:srgbClr val="1B3B6F"/>
                 </a:solidFill>
                 <a:latin typeface="Amiri" pitchFamily="2" charset="-78"/>
+                <a:ea typeface="Amiri" pitchFamily="2" charset="-78"/>
                 <a:cs typeface="Amiri" pitchFamily="2" charset="-78"/>
               </a:rPr>
               <a:t>هَلِ الاسْتِشَارَةُ الطِّبِّيَّةُ عَبْرَ الإِنْتَرْنِتِ فِكْرَةٌ جَيِّدَةٌ؟</a:t>
@@ -26392,6 +26587,7 @@
                   <a:srgbClr val="D4AF37"/>
                 </a:solidFill>
                 <a:latin typeface="Amiri" pitchFamily="2" charset="-78"/>
+                <a:ea typeface="Amiri" pitchFamily="2" charset="-78"/>
                 <a:cs typeface="Amiri" pitchFamily="2" charset="-78"/>
               </a:rPr>
               <a:t>م</a:t>
@@ -26712,6 +26908,7 @@
                   <a:srgbClr val="8A6D1E"/>
                 </a:solidFill>
                 <a:latin typeface="Amiri" pitchFamily="2" charset="-78"/>
+                <a:ea typeface="Amiri" pitchFamily="2" charset="-78"/>
                 <a:cs typeface="Amiri" pitchFamily="2" charset="-78"/>
               </a:rPr>
               <a:t>نَمُوذَجُ الإِجَابَةِ</a:t>
@@ -26954,6 +27151,7 @@
                   <a:srgbClr val="1B3B6F"/>
                 </a:solidFill>
                 <a:latin typeface="Amiri" pitchFamily="2" charset="-78"/>
+                <a:ea typeface="Amiri" pitchFamily="2" charset="-78"/>
                 <a:cs typeface="Amiri" pitchFamily="2" charset="-78"/>
               </a:rPr>
               <a:t>فِي أَيَّامِ جَدِّي كَانَ النَّاسُ يَمْشُونَ سَاعَاتٍ إِلَى أَقْرَبِ طَبِيبٍ، أَمَّا اليَوْمَ فَهُنَاكَ عِيَادَةٌ فِي كُلِّ حَيٍّ.</a:t>
@@ -27030,6 +27228,7 @@
                   <a:srgbClr val="1B3B6F"/>
                 </a:solidFill>
                 <a:latin typeface="Amiri" pitchFamily="2" charset="-78"/>
+                <a:ea typeface="Amiri" pitchFamily="2" charset="-78"/>
                 <a:cs typeface="Amiri" pitchFamily="2" charset="-78"/>
               </a:rPr>
               <a:t>كَيْفَ تَغَيَّرَتْ خِدْمَاتُ الصِّحَّةِ مُنْذُ أَيَّامِ أَجْدَادِكَ؟</a:t>
@@ -27133,6 +27332,7 @@
                   <a:srgbClr val="1B3B6F"/>
                 </a:solidFill>
                 <a:latin typeface="Amiri" pitchFamily="2" charset="-78"/>
+                <a:ea typeface="Amiri" pitchFamily="2" charset="-78"/>
                 <a:cs typeface="Amiri" pitchFamily="2" charset="-78"/>
               </a:rPr>
               <a:t>لَوْ أَصْبَحْتُ طَبِيبًا، لَعَمِلْتُ فِي قَرْيَةٍ بَعِيدَةٍ، لِأَنَّ أَهْلَهَا يَحْتَاجُونَ إِلَى الأَطِبَّاءِ أَكْثَرَ مِنْ غَيْرِهِمْ.</a:t>
@@ -27209,6 +27409,7 @@
                   <a:srgbClr val="1B3B6F"/>
                 </a:solidFill>
                 <a:latin typeface="Amiri" pitchFamily="2" charset="-78"/>
+                <a:ea typeface="Amiri" pitchFamily="2" charset="-78"/>
                 <a:cs typeface="Amiri" pitchFamily="2" charset="-78"/>
               </a:rPr>
               <a:t>لَوْ أَصْبَحْتَ طَبِيبًا، أَيْنَ تُحِبُّ أَنْ تَعْمَلَ؟</a:t>
@@ -27418,6 +27619,7 @@
                   <a:srgbClr val="D4AF37"/>
                 </a:solidFill>
                 <a:latin typeface="Amiri" pitchFamily="2" charset="-78"/>
+                <a:ea typeface="Amiri" pitchFamily="2" charset="-78"/>
                 <a:cs typeface="Amiri" pitchFamily="2" charset="-78"/>
               </a:rPr>
               <a:t>م</a:t>
@@ -27738,6 +27940,7 @@
                   <a:srgbClr val="8A6D1E"/>
                 </a:solidFill>
                 <a:latin typeface="Amiri" pitchFamily="2" charset="-78"/>
+                <a:ea typeface="Amiri" pitchFamily="2" charset="-78"/>
                 <a:cs typeface="Amiri" pitchFamily="2" charset="-78"/>
               </a:rPr>
               <a:t>قَيِّمْ عَمَلَكَ</a:t>
@@ -28982,6 +29185,7 @@
                   <a:srgbClr val="FFFFFF"/>
                 </a:solidFill>
                 <a:latin typeface="Amiri" pitchFamily="2" charset="-78"/>
+                <a:ea typeface="Amiri" pitchFamily="2" charset="-78"/>
                 <a:cs typeface="Amiri" pitchFamily="2" charset="-78"/>
               </a:rPr>
               <a:t>أَحْسَنْتُمْ! إِلَى اللِّقَاءِ</a:t>
@@ -29134,6 +29338,7 @@
                   <a:srgbClr val="D4AF37"/>
                 </a:solidFill>
                 <a:latin typeface="Amiri" pitchFamily="2" charset="-78"/>
+                <a:ea typeface="Amiri" pitchFamily="2" charset="-78"/>
                 <a:cs typeface="Amiri" pitchFamily="2" charset="-78"/>
               </a:rPr>
               <a:t>وَرْشَةُ الكِتَابَةِ</a:t>
@@ -29267,6 +29472,7 @@
                   <a:srgbClr val="D4AF37"/>
                 </a:solidFill>
                 <a:latin typeface="Amiri" pitchFamily="2" charset="-78"/>
+                <a:ea typeface="Amiri" pitchFamily="2" charset="-78"/>
                 <a:cs typeface="Amiri" pitchFamily="2" charset="-78"/>
               </a:rPr>
               <a:t>م</a:t>
@@ -29587,6 +29793,7 @@
                   <a:srgbClr val="8A6D1E"/>
                 </a:solidFill>
                 <a:latin typeface="Amiri" pitchFamily="2" charset="-78"/>
+                <a:ea typeface="Amiri" pitchFamily="2" charset="-78"/>
                 <a:cs typeface="Amiri" pitchFamily="2" charset="-78"/>
               </a:rPr>
               <a:t>خَرِيطَةُ الوَرْشَةِ</a:t>
@@ -29901,6 +30108,7 @@
                   <a:srgbClr val="1B3B6F"/>
                 </a:solidFill>
                 <a:latin typeface="Amiri" pitchFamily="2" charset="-78"/>
+                <a:ea typeface="Amiri" pitchFamily="2" charset="-78"/>
                 <a:cs typeface="Amiri" pitchFamily="2" charset="-78"/>
               </a:rPr>
               <a:t>كَيْفَ</a:t>
@@ -30177,6 +30385,7 @@
                   <a:srgbClr val="1E6B52"/>
                 </a:solidFill>
                 <a:latin typeface="Amiri" pitchFamily="2" charset="-78"/>
+                <a:ea typeface="Amiri" pitchFamily="2" charset="-78"/>
                 <a:cs typeface="Amiri" pitchFamily="2" charset="-78"/>
               </a:rPr>
               <a:t>تَمْثِيلُ الدَّوْرِ</a:t>
@@ -30453,6 +30662,7 @@
                   <a:srgbClr val="8A6D1E"/>
                 </a:solidFill>
                 <a:latin typeface="Amiri" pitchFamily="2" charset="-78"/>
+                <a:ea typeface="Amiri" pitchFamily="2" charset="-78"/>
                 <a:cs typeface="Amiri" pitchFamily="2" charset="-78"/>
               </a:rPr>
               <a:t>النَّمُوذَجُ</a:t>
@@ -30729,6 +30939,7 @@
                   <a:srgbClr val="1E6B52"/>
                 </a:solidFill>
                 <a:latin typeface="Amiri" pitchFamily="2" charset="-78"/>
+                <a:ea typeface="Amiri" pitchFamily="2" charset="-78"/>
                 <a:cs typeface="Amiri" pitchFamily="2" charset="-78"/>
               </a:rPr>
               <a:t>المُحَادَثَةُ</a:t>
@@ -31005,6 +31216,7 @@
                   <a:srgbClr val="8A6D1E"/>
                 </a:solidFill>
                 <a:latin typeface="Amiri" pitchFamily="2" charset="-78"/>
+                <a:ea typeface="Amiri" pitchFamily="2" charset="-78"/>
                 <a:cs typeface="Amiri" pitchFamily="2" charset="-78"/>
               </a:rPr>
               <a:t>قَيِّمْ</a:t>
@@ -31248,6 +31460,7 @@
                   <a:srgbClr val="D4AF37"/>
                 </a:solidFill>
                 <a:latin typeface="Amiri" pitchFamily="2" charset="-78"/>
+                <a:ea typeface="Amiri" pitchFamily="2" charset="-78"/>
                 <a:cs typeface="Amiri" pitchFamily="2" charset="-78"/>
               </a:rPr>
               <a:t>م</a:t>
@@ -31568,6 +31781,7 @@
                   <a:srgbClr val="8A6D1E"/>
                 </a:solidFill>
                 <a:latin typeface="Amiri" pitchFamily="2" charset="-78"/>
+                <a:ea typeface="Amiri" pitchFamily="2" charset="-78"/>
                 <a:cs typeface="Amiri" pitchFamily="2" charset="-78"/>
               </a:rPr>
               <a:t>امْتِحَانُ التَّحَدُّثِ</a:t>
@@ -32192,6 +32406,7 @@
                   <a:srgbClr val="1B3B6F"/>
                 </a:solidFill>
                 <a:latin typeface="Amiri" pitchFamily="2" charset="-78"/>
+                <a:ea typeface="Amiri" pitchFamily="2" charset="-78"/>
                 <a:cs typeface="Amiri" pitchFamily="2" charset="-78"/>
               </a:rPr>
               <a:t>عَفْوًا، هَلْ يُمْكِنُ أَنْ تُعِيدَ السُّؤَالَ؟</a:t>
@@ -32291,6 +32506,7 @@
                   <a:srgbClr val="1B3B6F"/>
                 </a:solidFill>
                 <a:latin typeface="Amiri" pitchFamily="2" charset="-78"/>
+                <a:ea typeface="Amiri" pitchFamily="2" charset="-78"/>
                 <a:cs typeface="Amiri" pitchFamily="2" charset="-78"/>
               </a:rPr>
               <a:t>لَحْظَةً، دَعْنِي أُفَكِّرُ …</a:t>
@@ -32390,6 +32606,7 @@
                   <a:srgbClr val="1B3B6F"/>
                 </a:solidFill>
                 <a:latin typeface="Amiri" pitchFamily="2" charset="-78"/>
+                <a:ea typeface="Amiri" pitchFamily="2" charset="-78"/>
                 <a:cs typeface="Amiri" pitchFamily="2" charset="-78"/>
               </a:rPr>
               <a:t>أَقْصِدُ …</a:t>
@@ -32561,6 +32778,7 @@
                   <a:srgbClr val="D4AF37"/>
                 </a:solidFill>
                 <a:latin typeface="Amiri" pitchFamily="2" charset="-78"/>
+                <a:ea typeface="Amiri" pitchFamily="2" charset="-78"/>
                 <a:cs typeface="Amiri" pitchFamily="2" charset="-78"/>
               </a:rPr>
               <a:t>م</a:t>
@@ -32881,6 +33099,7 @@
                   <a:srgbClr val="8A6D1E"/>
                 </a:solidFill>
                 <a:latin typeface="Amiri" pitchFamily="2" charset="-78"/>
+                <a:ea typeface="Amiri" pitchFamily="2" charset="-78"/>
                 <a:cs typeface="Amiri" pitchFamily="2" charset="-78"/>
               </a:rPr>
               <a:t>فِي العِيَادَةِ</a:t>
@@ -33184,6 +33403,7 @@
                   <a:srgbClr val="1B3B6F"/>
                 </a:solidFill>
                 <a:latin typeface="Amiri" pitchFamily="2" charset="-78"/>
+                <a:ea typeface="Amiri" pitchFamily="2" charset="-78"/>
                 <a:cs typeface="Amiri" pitchFamily="2" charset="-78"/>
               </a:rPr>
               <a:t>طَبِيبٌ</a:t>
@@ -33341,6 +33561,7 @@
                   <a:srgbClr val="1B3B6F"/>
                 </a:solidFill>
                 <a:latin typeface="Amiri" pitchFamily="2" charset="-78"/>
+                <a:ea typeface="Amiri" pitchFamily="2" charset="-78"/>
                 <a:cs typeface="Amiri" pitchFamily="2" charset="-78"/>
               </a:rPr>
               <a:t>أَطِبَّاءُ</a:t>
@@ -33444,6 +33665,7 @@
                   <a:srgbClr val="1B3B6F"/>
                 </a:solidFill>
                 <a:latin typeface="Amiri" pitchFamily="2" charset="-78"/>
+                <a:ea typeface="Amiri" pitchFamily="2" charset="-78"/>
                 <a:cs typeface="Amiri" pitchFamily="2" charset="-78"/>
               </a:rPr>
               <a:t>طَبِيبَةٌ</a:t>
@@ -33547,6 +33769,7 @@
                   <a:srgbClr val="1B3B6F"/>
                 </a:solidFill>
                 <a:latin typeface="Amiri" pitchFamily="2" charset="-78"/>
+                <a:ea typeface="Amiri" pitchFamily="2" charset="-78"/>
                 <a:cs typeface="Amiri" pitchFamily="2" charset="-78"/>
               </a:rPr>
               <a:t>طَبِيبٌ</a:t>
@@ -33812,6 +34035,7 @@
                   <a:srgbClr val="1B3B6F"/>
                 </a:solidFill>
                 <a:latin typeface="Amiri" pitchFamily="2" charset="-78"/>
+                <a:ea typeface="Amiri" pitchFamily="2" charset="-78"/>
                 <a:cs typeface="Amiri" pitchFamily="2" charset="-78"/>
               </a:rPr>
               <a:t>صَيْدَلِيٌّ</a:t>
@@ -33969,6 +34193,7 @@
                   <a:srgbClr val="1B3B6F"/>
                 </a:solidFill>
                 <a:latin typeface="Amiri" pitchFamily="2" charset="-78"/>
+                <a:ea typeface="Amiri" pitchFamily="2" charset="-78"/>
                 <a:cs typeface="Amiri" pitchFamily="2" charset="-78"/>
               </a:rPr>
               <a:t>صَيَادِلَةٌ</a:t>
@@ -34072,6 +34297,7 @@
                   <a:srgbClr val="1B3B6F"/>
                 </a:solidFill>
                 <a:latin typeface="Amiri" pitchFamily="2" charset="-78"/>
+                <a:ea typeface="Amiri" pitchFamily="2" charset="-78"/>
                 <a:cs typeface="Amiri" pitchFamily="2" charset="-78"/>
               </a:rPr>
               <a:t>صَيْدَلِيَّةٌ</a:t>
@@ -34175,6 +34401,7 @@
                   <a:srgbClr val="1B3B6F"/>
                 </a:solidFill>
                 <a:latin typeface="Amiri" pitchFamily="2" charset="-78"/>
+                <a:ea typeface="Amiri" pitchFamily="2" charset="-78"/>
                 <a:cs typeface="Amiri" pitchFamily="2" charset="-78"/>
               </a:rPr>
               <a:t>صَيْدَلِيٌّ</a:t>
@@ -34440,6 +34667,7 @@
                   <a:srgbClr val="1B3B6F"/>
                 </a:solidFill>
                 <a:latin typeface="Amiri" pitchFamily="2" charset="-78"/>
+                <a:ea typeface="Amiri" pitchFamily="2" charset="-78"/>
                 <a:cs typeface="Amiri" pitchFamily="2" charset="-78"/>
               </a:rPr>
               <a:t>مَوْعِدٌ</a:t>
@@ -34597,6 +34825,7 @@
                   <a:srgbClr val="1B3B6F"/>
                 </a:solidFill>
                 <a:latin typeface="Amiri" pitchFamily="2" charset="-78"/>
+                <a:ea typeface="Amiri" pitchFamily="2" charset="-78"/>
                 <a:cs typeface="Amiri" pitchFamily="2" charset="-78"/>
               </a:rPr>
               <a:t>مَوَاعِيدُ</a:t>
@@ -34700,6 +34929,7 @@
                   <a:srgbClr val="1B3B6F"/>
                 </a:solidFill>
                 <a:latin typeface="Amiri" pitchFamily="2" charset="-78"/>
+                <a:ea typeface="Amiri" pitchFamily="2" charset="-78"/>
                 <a:cs typeface="Amiri" pitchFamily="2" charset="-78"/>
               </a:rPr>
               <a:t>مَوْعِدٌ</a:t>
@@ -34965,6 +35195,7 @@
                   <a:srgbClr val="1B3B6F"/>
                 </a:solidFill>
                 <a:latin typeface="Amiri" pitchFamily="2" charset="-78"/>
+                <a:ea typeface="Amiri" pitchFamily="2" charset="-78"/>
                 <a:cs typeface="Amiri" pitchFamily="2" charset="-78"/>
               </a:rPr>
               <a:t>دَوَاءٌ</a:t>
@@ -35122,6 +35353,7 @@
                   <a:srgbClr val="1B3B6F"/>
                 </a:solidFill>
                 <a:latin typeface="Amiri" pitchFamily="2" charset="-78"/>
+                <a:ea typeface="Amiri" pitchFamily="2" charset="-78"/>
                 <a:cs typeface="Amiri" pitchFamily="2" charset="-78"/>
               </a:rPr>
               <a:t>أَدْوِيَةٌ</a:t>
@@ -35225,6 +35457,7 @@
                   <a:srgbClr val="1B3B6F"/>
                 </a:solidFill>
                 <a:latin typeface="Amiri" pitchFamily="2" charset="-78"/>
+                <a:ea typeface="Amiri" pitchFamily="2" charset="-78"/>
                 <a:cs typeface="Amiri" pitchFamily="2" charset="-78"/>
               </a:rPr>
               <a:t>دَوَاءٌ</a:t>
@@ -35490,6 +35723,7 @@
                   <a:srgbClr val="1B3B6F"/>
                 </a:solidFill>
                 <a:latin typeface="Amiri" pitchFamily="2" charset="-78"/>
+                <a:ea typeface="Amiri" pitchFamily="2" charset="-78"/>
                 <a:cs typeface="Amiri" pitchFamily="2" charset="-78"/>
               </a:rPr>
               <a:t>حَبَّةٌ · شَرَابٌ · مَرْهَمٌ</a:t>
@@ -35647,6 +35881,7 @@
                   <a:srgbClr val="1B3B6F"/>
                 </a:solidFill>
                 <a:latin typeface="Amiri" pitchFamily="2" charset="-78"/>
+                <a:ea typeface="Amiri" pitchFamily="2" charset="-78"/>
                 <a:cs typeface="Amiri" pitchFamily="2" charset="-78"/>
               </a:rPr>
               <a:t>حُبُوبٌ</a:t>
@@ -35912,6 +36147,7 @@
                   <a:srgbClr val="1B3B6F"/>
                 </a:solidFill>
                 <a:latin typeface="Amiri" pitchFamily="2" charset="-78"/>
+                <a:ea typeface="Amiri" pitchFamily="2" charset="-78"/>
                 <a:cs typeface="Amiri" pitchFamily="2" charset="-78"/>
               </a:rPr>
               <a:t>وَصْفَةٌ طِبِّيَّةٌ</a:t>
@@ -36069,6 +36305,7 @@
                   <a:srgbClr val="1B3B6F"/>
                 </a:solidFill>
                 <a:latin typeface="Amiri" pitchFamily="2" charset="-78"/>
+                <a:ea typeface="Amiri" pitchFamily="2" charset="-78"/>
                 <a:cs typeface="Amiri" pitchFamily="2" charset="-78"/>
               </a:rPr>
               <a:t>وَصَفَاتٌ</a:t>
@@ -36172,6 +36409,7 @@
                   <a:srgbClr val="1B3B6F"/>
                 </a:solidFill>
                 <a:latin typeface="Amiri" pitchFamily="2" charset="-78"/>
+                <a:ea typeface="Amiri" pitchFamily="2" charset="-78"/>
                 <a:cs typeface="Amiri" pitchFamily="2" charset="-78"/>
               </a:rPr>
               <a:t>وَصْفَةٌ</a:t>
@@ -36305,6 +36543,7 @@
                   <a:srgbClr val="D4AF37"/>
                 </a:solidFill>
                 <a:latin typeface="Amiri" pitchFamily="2" charset="-78"/>
+                <a:ea typeface="Amiri" pitchFamily="2" charset="-78"/>
                 <a:cs typeface="Amiri" pitchFamily="2" charset="-78"/>
               </a:rPr>
               <a:t>م</a:t>
@@ -36625,6 +36864,7 @@
                   <a:srgbClr val="8A6D1E"/>
                 </a:solidFill>
                 <a:latin typeface="Amiri" pitchFamily="2" charset="-78"/>
+                <a:ea typeface="Amiri" pitchFamily="2" charset="-78"/>
                 <a:cs typeface="Amiri" pitchFamily="2" charset="-78"/>
               </a:rPr>
               <a:t>النَّصَائِحُ وَالتَّعْلِيمَاتُ</a:t>
@@ -36928,6 +37168,7 @@
                   <a:srgbClr val="1B3B6F"/>
                 </a:solidFill>
                 <a:latin typeface="Amiri" pitchFamily="2" charset="-78"/>
+                <a:ea typeface="Amiri" pitchFamily="2" charset="-78"/>
                 <a:cs typeface="Amiri" pitchFamily="2" charset="-78"/>
               </a:rPr>
               <a:t>أَنْصَحُكَ بِأَنْ …</a:t>
@@ -37085,6 +37326,7 @@
                   <a:srgbClr val="1B3B6F"/>
                 </a:solidFill>
                 <a:latin typeface="Amiri" pitchFamily="2" charset="-78"/>
+                <a:ea typeface="Amiri" pitchFamily="2" charset="-78"/>
                 <a:cs typeface="Amiri" pitchFamily="2" charset="-78"/>
               </a:rPr>
               <a:t>أَنْصَحُكُمْ</a:t>
@@ -37188,6 +37430,7 @@
                   <a:srgbClr val="1B3B6F"/>
                 </a:solidFill>
                 <a:latin typeface="Amiri" pitchFamily="2" charset="-78"/>
+                <a:ea typeface="Amiri" pitchFamily="2" charset="-78"/>
                 <a:cs typeface="Amiri" pitchFamily="2" charset="-78"/>
               </a:rPr>
               <a:t>أَنْصَحُكِ</a:t>
@@ -37453,6 +37696,7 @@
                   <a:srgbClr val="1B3B6F"/>
                 </a:solidFill>
                 <a:latin typeface="Amiri" pitchFamily="2" charset="-78"/>
+                <a:ea typeface="Amiri" pitchFamily="2" charset="-78"/>
                 <a:cs typeface="Amiri" pitchFamily="2" charset="-78"/>
               </a:rPr>
               <a:t>خُذْ …</a:t>
@@ -37610,6 +37854,7 @@
                   <a:srgbClr val="1B3B6F"/>
                 </a:solidFill>
                 <a:latin typeface="Amiri" pitchFamily="2" charset="-78"/>
+                <a:ea typeface="Amiri" pitchFamily="2" charset="-78"/>
                 <a:cs typeface="Amiri" pitchFamily="2" charset="-78"/>
               </a:rPr>
               <a:t>خُذُوا</a:t>
@@ -37713,6 +37958,7 @@
                   <a:srgbClr val="1B3B6F"/>
                 </a:solidFill>
                 <a:latin typeface="Amiri" pitchFamily="2" charset="-78"/>
+                <a:ea typeface="Amiri" pitchFamily="2" charset="-78"/>
                 <a:cs typeface="Amiri" pitchFamily="2" charset="-78"/>
               </a:rPr>
               <a:t>خُذِي</a:t>
@@ -37816,6 +38062,7 @@
                   <a:srgbClr val="1B3B6F"/>
                 </a:solidFill>
                 <a:latin typeface="Amiri" pitchFamily="2" charset="-78"/>
+                <a:ea typeface="Amiri" pitchFamily="2" charset="-78"/>
                 <a:cs typeface="Amiri" pitchFamily="2" charset="-78"/>
               </a:rPr>
               <a:t>خُذْ</a:t>
@@ -38081,6 +38328,7 @@
                   <a:srgbClr val="1B3B6F"/>
                 </a:solidFill>
                 <a:latin typeface="Amiri" pitchFamily="2" charset="-78"/>
+                <a:ea typeface="Amiri" pitchFamily="2" charset="-78"/>
                 <a:cs typeface="Amiri" pitchFamily="2" charset="-78"/>
               </a:rPr>
               <a:t>ارْتَحْ</a:t>
@@ -38238,6 +38486,7 @@
                   <a:srgbClr val="1B3B6F"/>
                 </a:solidFill>
                 <a:latin typeface="Amiri" pitchFamily="2" charset="-78"/>
+                <a:ea typeface="Amiri" pitchFamily="2" charset="-78"/>
                 <a:cs typeface="Amiri" pitchFamily="2" charset="-78"/>
               </a:rPr>
               <a:t>ارْتَاحُوا</a:t>
@@ -38341,6 +38590,7 @@
                   <a:srgbClr val="1B3B6F"/>
                 </a:solidFill>
                 <a:latin typeface="Amiri" pitchFamily="2" charset="-78"/>
+                <a:ea typeface="Amiri" pitchFamily="2" charset="-78"/>
                 <a:cs typeface="Amiri" pitchFamily="2" charset="-78"/>
               </a:rPr>
               <a:t>ارْتَاحِي</a:t>
@@ -38444,6 +38694,7 @@
                   <a:srgbClr val="1B3B6F"/>
                 </a:solidFill>
                 <a:latin typeface="Amiri" pitchFamily="2" charset="-78"/>
+                <a:ea typeface="Amiri" pitchFamily="2" charset="-78"/>
                 <a:cs typeface="Amiri" pitchFamily="2" charset="-78"/>
               </a:rPr>
               <a:t>ارْتَحْ</a:t>
@@ -38709,6 +38960,7 @@
                   <a:srgbClr val="1B3B6F"/>
                 </a:solidFill>
                 <a:latin typeface="Amiri" pitchFamily="2" charset="-78"/>
+                <a:ea typeface="Amiri" pitchFamily="2" charset="-78"/>
                 <a:cs typeface="Amiri" pitchFamily="2" charset="-78"/>
               </a:rPr>
               <a:t>مَرَّتَيْنِ فِي اليَوْمِ</a:t>
@@ -39028,6 +39280,7 @@
                   <a:srgbClr val="1B3B6F"/>
                 </a:solidFill>
                 <a:latin typeface="Amiri" pitchFamily="2" charset="-78"/>
+                <a:ea typeface="Amiri" pitchFamily="2" charset="-78"/>
                 <a:cs typeface="Amiri" pitchFamily="2" charset="-78"/>
               </a:rPr>
               <a:t>قَبْلَ الأَكْلِ · بَعْدَ الأَكْلِ</a:t>
@@ -39347,6 +39600,7 @@
                   <a:srgbClr val="1B3B6F"/>
                 </a:solidFill>
                 <a:latin typeface="Amiri" pitchFamily="2" charset="-78"/>
+                <a:ea typeface="Amiri" pitchFamily="2" charset="-78"/>
                 <a:cs typeface="Amiri" pitchFamily="2" charset="-78"/>
               </a:rPr>
               <a:t>هَلْ يُمْكِنُ أَنْ …؟</a:t>
@@ -39534,6 +39788,7 @@
                   <a:srgbClr val="D4AF37"/>
                 </a:solidFill>
                 <a:latin typeface="Amiri" pitchFamily="2" charset="-78"/>
+                <a:ea typeface="Amiri" pitchFamily="2" charset="-78"/>
                 <a:cs typeface="Amiri" pitchFamily="2" charset="-78"/>
               </a:rPr>
               <a:t>م</a:t>
@@ -39854,6 +40109,7 @@
                   <a:srgbClr val="8A6D1E"/>
                 </a:solidFill>
                 <a:latin typeface="Amiri" pitchFamily="2" charset="-78"/>
+                <a:ea typeface="Amiri" pitchFamily="2" charset="-78"/>
                 <a:cs typeface="Amiri" pitchFamily="2" charset="-78"/>
               </a:rPr>
               <a:t>فِي الغُرَفِ</a:t>
@@ -41030,6 +41286,7 @@
                   <a:srgbClr val="1B3B6F"/>
                 </a:solidFill>
                 <a:latin typeface="Amiri" pitchFamily="2" charset="-78"/>
+                <a:ea typeface="Amiri" pitchFamily="2" charset="-78"/>
                 <a:cs typeface="Amiri" pitchFamily="2" charset="-78"/>
               </a:rPr>
               <a:t>دَوْرُكَ!</a:t>
@@ -41106,6 +41363,7 @@
                   <a:srgbClr val="1B3B6F"/>
                 </a:solidFill>
                 <a:latin typeface="Amiri" pitchFamily="2" charset="-78"/>
+                <a:ea typeface="Amiri" pitchFamily="2" charset="-78"/>
                 <a:cs typeface="Amiri" pitchFamily="2" charset="-78"/>
               </a:rPr>
               <a:t>أَحْسَنْتَ! / أَحْسَنْتِ!</a:t>
@@ -41182,6 +41440,7 @@
                   <a:srgbClr val="1B3B6F"/>
                 </a:solidFill>
                 <a:latin typeface="Amiri" pitchFamily="2" charset="-78"/>
+                <a:ea typeface="Amiri" pitchFamily="2" charset="-78"/>
                 <a:cs typeface="Amiri" pitchFamily="2" charset="-78"/>
               </a:rPr>
               <a:t>تَكَلَّمْ أَكْثَرَ، مِنْ فَضْلِكَ</a:t>
@@ -41258,6 +41517,7 @@
                   <a:srgbClr val="1B3B6F"/>
                 </a:solidFill>
                 <a:latin typeface="Amiri" pitchFamily="2" charset="-78"/>
+                <a:ea typeface="Amiri" pitchFamily="2" charset="-78"/>
                 <a:cs typeface="Amiri" pitchFamily="2" charset="-78"/>
               </a:rPr>
               <a:t>لِمَاذَا؟</a:t>
@@ -41429,6 +41689,7 @@
                   <a:srgbClr val="D4AF37"/>
                 </a:solidFill>
                 <a:latin typeface="Amiri" pitchFamily="2" charset="-78"/>
+                <a:ea typeface="Amiri" pitchFamily="2" charset="-78"/>
                 <a:cs typeface="Amiri" pitchFamily="2" charset="-78"/>
               </a:rPr>
               <a:t>م</a:t>
@@ -41749,6 +42010,7 @@
                   <a:srgbClr val="8A6D1E"/>
                 </a:solidFill>
                 <a:latin typeface="Amiri" pitchFamily="2" charset="-78"/>
+                <a:ea typeface="Amiri" pitchFamily="2" charset="-78"/>
                 <a:cs typeface="Amiri" pitchFamily="2" charset="-78"/>
               </a:rPr>
               <a:t>أَحْجِزُ مَوْعِدًا</a:t>
@@ -42029,6 +42291,7 @@
                   <a:srgbClr val="1B3B6F"/>
                 </a:solidFill>
                 <a:latin typeface="Amiri" pitchFamily="2" charset="-78"/>
+                <a:ea typeface="Amiri" pitchFamily="2" charset="-78"/>
                 <a:cs typeface="Amiri" pitchFamily="2" charset="-78"/>
               </a:rPr>
               <a:t>هَلْ يُمْكِنُ أَنْ أَحْجِزَ …؟</a:t>
@@ -42105,6 +42368,7 @@
                   <a:srgbClr val="1B3B6F"/>
                 </a:solidFill>
                 <a:latin typeface="Amiri" pitchFamily="2" charset="-78"/>
+                <a:ea typeface="Amiri" pitchFamily="2" charset="-78"/>
                 <a:cs typeface="Amiri" pitchFamily="2" charset="-78"/>
               </a:rPr>
               <a:t>عِيَادَةُ الشِّفَاءِ، كَيْفَ أُسَاعِدُكَ؟</a:t>
@@ -42273,6 +42537,7 @@
                   <a:srgbClr val="1B3B6F"/>
                 </a:solidFill>
                 <a:latin typeface="Amiri" pitchFamily="2" charset="-78"/>
+                <a:ea typeface="Amiri" pitchFamily="2" charset="-78"/>
                 <a:cs typeface="Amiri" pitchFamily="2" charset="-78"/>
               </a:rPr>
               <a:t>اسْمِي … وَعُمْرِي …</a:t>
@@ -42349,6 +42614,7 @@
                   <a:srgbClr val="1B3B6F"/>
                 </a:solidFill>
                 <a:latin typeface="Amiri" pitchFamily="2" charset="-78"/>
+                <a:ea typeface="Amiri" pitchFamily="2" charset="-78"/>
                 <a:cs typeface="Amiri" pitchFamily="2" charset="-78"/>
               </a:rPr>
               <a:t>مَا اسْمُكَ وَعُمْرُكَ؟</a:t>
@@ -42517,6 +42783,7 @@
                   <a:srgbClr val="1B3B6F"/>
                 </a:solidFill>
                 <a:latin typeface="Amiri" pitchFamily="2" charset="-78"/>
+                <a:ea typeface="Amiri" pitchFamily="2" charset="-78"/>
                 <a:cs typeface="Amiri" pitchFamily="2" charset="-78"/>
               </a:rPr>
               <a:t>عِنْدِي … وَيُؤْلِمُنِي …</a:t>
@@ -42593,6 +42860,7 @@
                   <a:srgbClr val="1B3B6F"/>
                 </a:solidFill>
                 <a:latin typeface="Amiri" pitchFamily="2" charset="-78"/>
+                <a:ea typeface="Amiri" pitchFamily="2" charset="-78"/>
                 <a:cs typeface="Amiri" pitchFamily="2" charset="-78"/>
               </a:rPr>
               <a:t>مَا المُشْكِلَةُ؟</a:t>
@@ -42761,6 +43029,7 @@
                   <a:srgbClr val="1B3B6F"/>
                 </a:solidFill>
                 <a:latin typeface="Amiri" pitchFamily="2" charset="-78"/>
+                <a:ea typeface="Amiri" pitchFamily="2" charset="-78"/>
                 <a:cs typeface="Amiri" pitchFamily="2" charset="-78"/>
               </a:rPr>
               <a:t>أُفَضِّلُ … لِأَنَّ …</a:t>
@@ -42837,6 +43106,7 @@
                   <a:srgbClr val="1B3B6F"/>
                 </a:solidFill>
                 <a:latin typeface="Amiri" pitchFamily="2" charset="-78"/>
+                <a:ea typeface="Amiri" pitchFamily="2" charset="-78"/>
                 <a:cs typeface="Amiri" pitchFamily="2" charset="-78"/>
               </a:rPr>
               <a:t>عِنْدَنَا مَوْعِدٌ غَدًا فِي العَاشِرَةِ أَوْ فِي الرَّابِعَةِ.</a:t>
@@ -43005,6 +43275,7 @@
                   <a:srgbClr val="1B3B6F"/>
                 </a:solidFill>
                 <a:latin typeface="Amiri" pitchFamily="2" charset="-78"/>
+                <a:ea typeface="Amiri" pitchFamily="2" charset="-78"/>
                 <a:cs typeface="Amiri" pitchFamily="2" charset="-78"/>
               </a:rPr>
               <a:t>لَا، لَيْسَ عِنْدِي … / نَعَمْ، مِنْ …</a:t>
@@ -43081,6 +43352,7 @@
                   <a:srgbClr val="1B3B6F"/>
                 </a:solidFill>
                 <a:latin typeface="Amiri" pitchFamily="2" charset="-78"/>
+                <a:ea typeface="Amiri" pitchFamily="2" charset="-78"/>
                 <a:cs typeface="Amiri" pitchFamily="2" charset="-78"/>
               </a:rPr>
               <a:t>هَلْ عِنْدَكَ حَسَاسِيَّةٌ مِنْ أَيِّ دَوَاءٍ؟</a:t>
@@ -43355,6 +43627,7 @@
                   <a:srgbClr val="D4AF37"/>
                 </a:solidFill>
                 <a:latin typeface="Amiri" pitchFamily="2" charset="-78"/>
+                <a:ea typeface="Amiri" pitchFamily="2" charset="-78"/>
                 <a:cs typeface="Amiri" pitchFamily="2" charset="-78"/>
               </a:rPr>
               <a:t>م</a:t>
@@ -43675,6 +43948,7 @@
                   <a:srgbClr val="8A6D1E"/>
                 </a:solidFill>
                 <a:latin typeface="Amiri" pitchFamily="2" charset="-78"/>
+                <a:ea typeface="Amiri" pitchFamily="2" charset="-78"/>
                 <a:cs typeface="Amiri" pitchFamily="2" charset="-78"/>
               </a:rPr>
               <a:t>فِي الصَّيْدَلِيَّةِ</a:t>
@@ -43955,6 +44229,7 @@
                   <a:srgbClr val="1B3B6F"/>
                 </a:solidFill>
                 <a:latin typeface="Amiri" pitchFamily="2" charset="-78"/>
+                <a:ea typeface="Amiri" pitchFamily="2" charset="-78"/>
                 <a:cs typeface="Amiri" pitchFamily="2" charset="-78"/>
               </a:rPr>
               <a:t>أُرِيدُ دَوَاءً لِلسُّعَالِ …</a:t>
@@ -44031,6 +44306,7 @@
                   <a:srgbClr val="1B3B6F"/>
                 </a:solidFill>
                 <a:latin typeface="Amiri" pitchFamily="2" charset="-78"/>
+                <a:ea typeface="Amiri" pitchFamily="2" charset="-78"/>
                 <a:cs typeface="Amiri" pitchFamily="2" charset="-78"/>
               </a:rPr>
               <a:t>أَهْلًا، تَفَضَّلْ.</a:t>
@@ -44199,6 +44475,7 @@
                   <a:srgbClr val="1B3B6F"/>
                 </a:solidFill>
                 <a:latin typeface="Amiri" pitchFamily="2" charset="-78"/>
+                <a:ea typeface="Amiri" pitchFamily="2" charset="-78"/>
                 <a:cs typeface="Amiri" pitchFamily="2" charset="-78"/>
               </a:rPr>
               <a:t>عُمْرُهُ …</a:t>
@@ -44275,6 +44552,7 @@
                   <a:srgbClr val="1B3B6F"/>
                 </a:solidFill>
                 <a:latin typeface="Amiri" pitchFamily="2" charset="-78"/>
+                <a:ea typeface="Amiri" pitchFamily="2" charset="-78"/>
                 <a:cs typeface="Amiri" pitchFamily="2" charset="-78"/>
               </a:rPr>
               <a:t>كَمْ عُمْرُهُ؟</a:t>
@@ -44443,6 +44721,7 @@
                   <a:srgbClr val="1B3B6F"/>
                 </a:solidFill>
                 <a:latin typeface="Amiri" pitchFamily="2" charset="-78"/>
+                <a:ea typeface="Amiri" pitchFamily="2" charset="-78"/>
                 <a:cs typeface="Amiri" pitchFamily="2" charset="-78"/>
               </a:rPr>
               <a:t>كَمْ مَرَّةً يَجِبُ أَنْ …؟</a:t>
@@ -44519,6 +44798,7 @@
                   <a:srgbClr val="1B3B6F"/>
                 </a:solidFill>
                 <a:latin typeface="Amiri" pitchFamily="2" charset="-78"/>
+                <a:ea typeface="Amiri" pitchFamily="2" charset="-78"/>
                 <a:cs typeface="Amiri" pitchFamily="2" charset="-78"/>
               </a:rPr>
               <a:t>هٰذَا الشَّرَابُ مُنَاسِبٌ.</a:t>
@@ -44622,6 +44902,7 @@
                   <a:srgbClr val="1B3B6F"/>
                 </a:solidFill>
                 <a:latin typeface="Amiri" pitchFamily="2" charset="-78"/>
+                <a:ea typeface="Amiri" pitchFamily="2" charset="-78"/>
                 <a:cs typeface="Amiri" pitchFamily="2" charset="-78"/>
               </a:rPr>
               <a:t>إِذَنْ، مِلْعَقَةً … بَعْدَ …</a:t>
@@ -44698,6 +44979,7 @@
                   <a:srgbClr val="1B3B6F"/>
                 </a:solidFill>
                 <a:latin typeface="Amiri" pitchFamily="2" charset="-78"/>
+                <a:ea typeface="Amiri" pitchFamily="2" charset="-78"/>
                 <a:cs typeface="Amiri" pitchFamily="2" charset="-78"/>
               </a:rPr>
               <a:t>مِلْعَقَةً ثَلَاثَ مَرَّاتٍ فِي اليَوْمِ، بَعْدَ الأَكْلِ.</a:t>
@@ -44801,6 +45083,7 @@
                   <a:srgbClr val="1B3B6F"/>
                 </a:solidFill>
                 <a:latin typeface="Amiri" pitchFamily="2" charset="-78"/>
+                <a:ea typeface="Amiri" pitchFamily="2" charset="-78"/>
                 <a:cs typeface="Amiri" pitchFamily="2" charset="-78"/>
               </a:rPr>
               <a:t>نَعَمْ، … / لَا، شُكْرًا، بِكَمْ …؟</a:t>
@@ -44877,6 +45160,7 @@
                   <a:srgbClr val="1B3B6F"/>
                 </a:solidFill>
                 <a:latin typeface="Amiri" pitchFamily="2" charset="-78"/>
+                <a:ea typeface="Amiri" pitchFamily="2" charset="-78"/>
                 <a:cs typeface="Amiri" pitchFamily="2" charset="-78"/>
               </a:rPr>
               <a:t>هَلْ تُرِيدُ شَيْئًا آخَرَ؟</a:t>
@@ -45051,13 +45335,9 @@
     <a:fontScheme name="Office">
       <a:majorFont>
         <a:latin typeface="Calibri Light" panose="020F0302020204030204"/>
-        <a:ea typeface=""/>
-        <a:cs typeface=""/>
-        <a:font script="Jpan" typeface="游ゴシック Light"/>
-        <a:font script="Hang" typeface="맑은 고딕"/>
-        <a:font script="Hans" typeface="等线 Light"/>
-        <a:font script="Hant" typeface="新細明體"/>
-        <a:font script="Arab" typeface="Times New Roman"/>
+        <a:ea typeface="Amiri" pitchFamily="2" charset="-78"/>
+        <a:cs typeface="Amiri" pitchFamily="2" charset="-78"/>
+        <a:font script="Arab" typeface="Amiri"/>
         <a:font script="Hebr" typeface="Times New Roman"/>
         <a:font script="Thai" typeface="Angsana New"/>
         <a:font script="Ethi" typeface="Nyala"/>
@@ -45103,13 +45383,9 @@
       </a:majorFont>
       <a:minorFont>
         <a:latin typeface="Calibri" panose="020F0502020204030204"/>
-        <a:ea typeface=""/>
-        <a:cs typeface=""/>
-        <a:font script="Jpan" typeface="游ゴシック"/>
-        <a:font script="Hang" typeface="맑은 고딕"/>
-        <a:font script="Hans" typeface="等线"/>
-        <a:font script="Hant" typeface="新細明體"/>
-        <a:font script="Arab" typeface="Arial"/>
+        <a:ea typeface="Amiri" pitchFamily="2" charset="-78"/>
+        <a:cs typeface="Amiri" pitchFamily="2" charset="-78"/>
+        <a:font script="Arab" typeface="Amiri"/>
         <a:font script="Hebr" typeface="Arial"/>
         <a:font script="Thai" typeface="Cordia New"/>
         <a:font script="Ethi" typeface="Nyala"/>
